--- a/logo_images/Logo.pptx
+++ b/logo_images/Logo.pptx
@@ -2,18 +2,18 @@
 <file path=ppt/presentation.xml><?xml version="1.0" encoding="utf-8"?>
 <p:presentation xmlns:a="http://schemas.openxmlformats.org/drawingml/2006/main" xmlns:r="http://schemas.openxmlformats.org/officeDocument/2006/relationships" xmlns:p="http://schemas.openxmlformats.org/presentationml/2006/main" saveSubsetFonts="1">
   <p:sldMasterIdLst>
-    <p:sldMasterId id="2147483648" r:id="rId1"/>
+    <p:sldMasterId id="2147483660" r:id="rId1"/>
   </p:sldMasterIdLst>
   <p:sldIdLst>
     <p:sldId id="256" r:id="rId2"/>
   </p:sldIdLst>
-  <p:sldSz cx="12192000" cy="6858000"/>
+  <p:sldSz cx="6858000" cy="6858000"/>
   <p:notesSz cx="6858000" cy="9144000"/>
   <p:defaultTextStyle>
     <a:defPPr>
       <a:defRPr lang="en-US"/>
     </a:defPPr>
-    <a:lvl1pPr marL="0" algn="l" defTabSz="914400" rtl="0" eaLnBrk="1" latinLnBrk="0" hangingPunct="1">
+    <a:lvl1pPr marL="0" algn="l" defTabSz="457200" rtl="0" eaLnBrk="1" latinLnBrk="0" hangingPunct="1">
       <a:defRPr sz="1800" kern="1200">
         <a:solidFill>
           <a:schemeClr val="tx1"/>
@@ -23,7 +23,7 @@
         <a:cs typeface="+mn-cs"/>
       </a:defRPr>
     </a:lvl1pPr>
-    <a:lvl2pPr marL="457200" algn="l" defTabSz="914400" rtl="0" eaLnBrk="1" latinLnBrk="0" hangingPunct="1">
+    <a:lvl2pPr marL="457200" algn="l" defTabSz="457200" rtl="0" eaLnBrk="1" latinLnBrk="0" hangingPunct="1">
       <a:defRPr sz="1800" kern="1200">
         <a:solidFill>
           <a:schemeClr val="tx1"/>
@@ -33,7 +33,7 @@
         <a:cs typeface="+mn-cs"/>
       </a:defRPr>
     </a:lvl2pPr>
-    <a:lvl3pPr marL="914400" algn="l" defTabSz="914400" rtl="0" eaLnBrk="1" latinLnBrk="0" hangingPunct="1">
+    <a:lvl3pPr marL="914400" algn="l" defTabSz="457200" rtl="0" eaLnBrk="1" latinLnBrk="0" hangingPunct="1">
       <a:defRPr sz="1800" kern="1200">
         <a:solidFill>
           <a:schemeClr val="tx1"/>
@@ -43,7 +43,7 @@
         <a:cs typeface="+mn-cs"/>
       </a:defRPr>
     </a:lvl3pPr>
-    <a:lvl4pPr marL="1371600" algn="l" defTabSz="914400" rtl="0" eaLnBrk="1" latinLnBrk="0" hangingPunct="1">
+    <a:lvl4pPr marL="1371600" algn="l" defTabSz="457200" rtl="0" eaLnBrk="1" latinLnBrk="0" hangingPunct="1">
       <a:defRPr sz="1800" kern="1200">
         <a:solidFill>
           <a:schemeClr val="tx1"/>
@@ -53,7 +53,7 @@
         <a:cs typeface="+mn-cs"/>
       </a:defRPr>
     </a:lvl4pPr>
-    <a:lvl5pPr marL="1828800" algn="l" defTabSz="914400" rtl="0" eaLnBrk="1" latinLnBrk="0" hangingPunct="1">
+    <a:lvl5pPr marL="1828800" algn="l" defTabSz="457200" rtl="0" eaLnBrk="1" latinLnBrk="0" hangingPunct="1">
       <a:defRPr sz="1800" kern="1200">
         <a:solidFill>
           <a:schemeClr val="tx1"/>
@@ -63,7 +63,7 @@
         <a:cs typeface="+mn-cs"/>
       </a:defRPr>
     </a:lvl5pPr>
-    <a:lvl6pPr marL="2286000" algn="l" defTabSz="914400" rtl="0" eaLnBrk="1" latinLnBrk="0" hangingPunct="1">
+    <a:lvl6pPr marL="2286000" algn="l" defTabSz="457200" rtl="0" eaLnBrk="1" latinLnBrk="0" hangingPunct="1">
       <a:defRPr sz="1800" kern="1200">
         <a:solidFill>
           <a:schemeClr val="tx1"/>
@@ -73,7 +73,7 @@
         <a:cs typeface="+mn-cs"/>
       </a:defRPr>
     </a:lvl6pPr>
-    <a:lvl7pPr marL="2743200" algn="l" defTabSz="914400" rtl="0" eaLnBrk="1" latinLnBrk="0" hangingPunct="1">
+    <a:lvl7pPr marL="2743200" algn="l" defTabSz="457200" rtl="0" eaLnBrk="1" latinLnBrk="0" hangingPunct="1">
       <a:defRPr sz="1800" kern="1200">
         <a:solidFill>
           <a:schemeClr val="tx1"/>
@@ -83,7 +83,7 @@
         <a:cs typeface="+mn-cs"/>
       </a:defRPr>
     </a:lvl7pPr>
-    <a:lvl8pPr marL="3200400" algn="l" defTabSz="914400" rtl="0" eaLnBrk="1" latinLnBrk="0" hangingPunct="1">
+    <a:lvl8pPr marL="3200400" algn="l" defTabSz="457200" rtl="0" eaLnBrk="1" latinLnBrk="0" hangingPunct="1">
       <a:defRPr sz="1800" kern="1200">
         <a:solidFill>
           <a:schemeClr val="tx1"/>
@@ -93,7 +93,7 @@
         <a:cs typeface="+mn-cs"/>
       </a:defRPr>
     </a:lvl8pPr>
-    <a:lvl9pPr marL="3657600" algn="l" defTabSz="914400" rtl="0" eaLnBrk="1" latinLnBrk="0" hangingPunct="1">
+    <a:lvl9pPr marL="3657600" algn="l" defTabSz="457200" rtl="0" eaLnBrk="1" latinLnBrk="0" hangingPunct="1">
       <a:defRPr sz="1800" kern="1200">
         <a:solidFill>
           <a:schemeClr val="tx1"/>
@@ -104,6 +104,11 @@
       </a:defRPr>
     </a:lvl9pPr>
   </p:defaultTextStyle>
+  <p:extLst>
+    <p:ext uri="{EFAFB233-063F-42B5-8137-9DF3F51BA10A}">
+      <p15:sldGuideLst xmlns:p15="http://schemas.microsoft.com/office/powerpoint/2012/main"/>
+    </p:ext>
+  </p:extLst>
 </p:presentation>
 </file>
 
@@ -126,13 +131,7 @@
       </p:grpSpPr>
       <p:sp>
         <p:nvSpPr>
-          <p:cNvPr id="2" name="Title 1">
-            <a:extLst>
-              <a:ext uri="{FF2B5EF4-FFF2-40B4-BE49-F238E27FC236}">
-                <a16:creationId xmlns:a16="http://schemas.microsoft.com/office/drawing/2014/main" id="{097365D6-B858-F263-5396-3C789F2C28DD}"/>
-              </a:ext>
-            </a:extLst>
-          </p:cNvPr>
+          <p:cNvPr id="2" name="Title 1"/>
           <p:cNvSpPr>
             <a:spLocks noGrp="1"/>
           </p:cNvSpPr>
@@ -142,15 +141,15 @@
         </p:nvSpPr>
         <p:spPr>
           <a:xfrm>
-            <a:off x="1524000" y="1122363"/>
-            <a:ext cx="9144000" cy="2387600"/>
+            <a:off x="514350" y="1122363"/>
+            <a:ext cx="5829300" cy="2387600"/>
           </a:xfrm>
         </p:spPr>
         <p:txBody>
           <a:bodyPr anchor="b"/>
           <a:lstStyle>
             <a:lvl1pPr algn="ctr">
-              <a:defRPr sz="6000"/>
+              <a:defRPr sz="4500"/>
             </a:lvl1pPr>
           </a:lstStyle>
           <a:p>
@@ -158,18 +157,13 @@
               <a:rPr lang="en-US"/>
               <a:t>Click to edit Master title style</a:t>
             </a:r>
-          </a:p>
-        </p:txBody>
-      </p:sp>
-      <p:sp>
-        <p:nvSpPr>
-          <p:cNvPr id="3" name="Subtitle 2">
-            <a:extLst>
-              <a:ext uri="{FF2B5EF4-FFF2-40B4-BE49-F238E27FC236}">
-                <a16:creationId xmlns:a16="http://schemas.microsoft.com/office/drawing/2014/main" id="{DCE20235-0FCA-D0D9-BCD6-5403D62EF425}"/>
-              </a:ext>
-            </a:extLst>
-          </p:cNvPr>
+            <a:endParaRPr lang="en-US" dirty="0"/>
+          </a:p>
+        </p:txBody>
+      </p:sp>
+      <p:sp>
+        <p:nvSpPr>
+          <p:cNvPr id="3" name="Subtitle 2"/>
           <p:cNvSpPr>
             <a:spLocks noGrp="1"/>
           </p:cNvSpPr>
@@ -179,8 +173,8 @@
         </p:nvSpPr>
         <p:spPr>
           <a:xfrm>
-            <a:off x="1524000" y="3602038"/>
-            <a:ext cx="9144000" cy="1655762"/>
+            <a:off x="857250" y="3602038"/>
+            <a:ext cx="5143500" cy="1655762"/>
           </a:xfrm>
         </p:spPr>
         <p:txBody>
@@ -188,39 +182,39 @@
           <a:lstStyle>
             <a:lvl1pPr marL="0" indent="0" algn="ctr">
               <a:buNone/>
-              <a:defRPr sz="2400"/>
+              <a:defRPr sz="1800"/>
             </a:lvl1pPr>
-            <a:lvl2pPr marL="457200" indent="0" algn="ctr">
-              <a:buNone/>
-              <a:defRPr sz="2000"/>
+            <a:lvl2pPr marL="342900" indent="0" algn="ctr">
+              <a:buNone/>
+              <a:defRPr sz="1500"/>
             </a:lvl2pPr>
-            <a:lvl3pPr marL="914400" indent="0" algn="ctr">
-              <a:buNone/>
-              <a:defRPr sz="1800"/>
+            <a:lvl3pPr marL="685800" indent="0" algn="ctr">
+              <a:buNone/>
+              <a:defRPr sz="1350"/>
             </a:lvl3pPr>
-            <a:lvl4pPr marL="1371600" indent="0" algn="ctr">
-              <a:buNone/>
-              <a:defRPr sz="1600"/>
+            <a:lvl4pPr marL="1028700" indent="0" algn="ctr">
+              <a:buNone/>
+              <a:defRPr sz="1200"/>
             </a:lvl4pPr>
-            <a:lvl5pPr marL="1828800" indent="0" algn="ctr">
-              <a:buNone/>
-              <a:defRPr sz="1600"/>
+            <a:lvl5pPr marL="1371600" indent="0" algn="ctr">
+              <a:buNone/>
+              <a:defRPr sz="1200"/>
             </a:lvl5pPr>
-            <a:lvl6pPr marL="2286000" indent="0" algn="ctr">
-              <a:buNone/>
-              <a:defRPr sz="1600"/>
+            <a:lvl6pPr marL="1714500" indent="0" algn="ctr">
+              <a:buNone/>
+              <a:defRPr sz="1200"/>
             </a:lvl6pPr>
-            <a:lvl7pPr marL="2743200" indent="0" algn="ctr">
-              <a:buNone/>
-              <a:defRPr sz="1600"/>
+            <a:lvl7pPr marL="2057400" indent="0" algn="ctr">
+              <a:buNone/>
+              <a:defRPr sz="1200"/>
             </a:lvl7pPr>
-            <a:lvl8pPr marL="3200400" indent="0" algn="ctr">
-              <a:buNone/>
-              <a:defRPr sz="1600"/>
+            <a:lvl8pPr marL="2400300" indent="0" algn="ctr">
+              <a:buNone/>
+              <a:defRPr sz="1200"/>
             </a:lvl8pPr>
-            <a:lvl9pPr marL="3657600" indent="0" algn="ctr">
-              <a:buNone/>
-              <a:defRPr sz="1600"/>
+            <a:lvl9pPr marL="2743200" indent="0" algn="ctr">
+              <a:buNone/>
+              <a:defRPr sz="1200"/>
             </a:lvl9pPr>
           </a:lstStyle>
           <a:p>
@@ -228,18 +222,13 @@
               <a:rPr lang="en-US"/>
               <a:t>Click to edit Master subtitle style</a:t>
             </a:r>
-          </a:p>
-        </p:txBody>
-      </p:sp>
-      <p:sp>
-        <p:nvSpPr>
-          <p:cNvPr id="4" name="Date Placeholder 3">
-            <a:extLst>
-              <a:ext uri="{FF2B5EF4-FFF2-40B4-BE49-F238E27FC236}">
-                <a16:creationId xmlns:a16="http://schemas.microsoft.com/office/drawing/2014/main" id="{88E54201-9A47-1C43-ED95-B6094865661F}"/>
-              </a:ext>
-            </a:extLst>
-          </p:cNvPr>
+            <a:endParaRPr lang="en-US" dirty="0"/>
+          </a:p>
+        </p:txBody>
+      </p:sp>
+      <p:sp>
+        <p:nvSpPr>
+          <p:cNvPr id="4" name="Date Placeholder 3"/>
           <p:cNvSpPr>
             <a:spLocks noGrp="1"/>
           </p:cNvSpPr>
@@ -254,7 +243,7 @@
           <a:p>
             <a:fld id="{D5673968-EB4A-4ACE-9624-571A35D0F85A}" type="datetimeFigureOut">
               <a:rPr lang="en-US" smtClean="0"/>
-              <a:t>5/9/2026</a:t>
+              <a:t>5/18/2026</a:t>
             </a:fld>
             <a:endParaRPr lang="en-US"/>
           </a:p>
@@ -262,13 +251,7 @@
       </p:sp>
       <p:sp>
         <p:nvSpPr>
-          <p:cNvPr id="5" name="Footer Placeholder 4">
-            <a:extLst>
-              <a:ext uri="{FF2B5EF4-FFF2-40B4-BE49-F238E27FC236}">
-                <a16:creationId xmlns:a16="http://schemas.microsoft.com/office/drawing/2014/main" id="{87A81176-76E8-FEC7-A453-EF8A78324A6D}"/>
-              </a:ext>
-            </a:extLst>
-          </p:cNvPr>
+          <p:cNvPr id="5" name="Footer Placeholder 4"/>
           <p:cNvSpPr>
             <a:spLocks noGrp="1"/>
           </p:cNvSpPr>
@@ -287,13 +270,7 @@
       </p:sp>
       <p:sp>
         <p:nvSpPr>
-          <p:cNvPr id="6" name="Slide Number Placeholder 5">
-            <a:extLst>
-              <a:ext uri="{FF2B5EF4-FFF2-40B4-BE49-F238E27FC236}">
-                <a16:creationId xmlns:a16="http://schemas.microsoft.com/office/drawing/2014/main" id="{130B898D-A838-5C1F-1F0A-2BC51233CE62}"/>
-              </a:ext>
-            </a:extLst>
-          </p:cNvPr>
+          <p:cNvPr id="6" name="Slide Number Placeholder 5"/>
           <p:cNvSpPr>
             <a:spLocks noGrp="1"/>
           </p:cNvSpPr>
@@ -317,7 +294,7 @@
     </p:spTree>
     <p:extLst>
       <p:ext uri="{BB962C8B-B14F-4D97-AF65-F5344CB8AC3E}">
-        <p14:creationId xmlns:p14="http://schemas.microsoft.com/office/powerpoint/2010/main" val="2412987882"/>
+        <p14:creationId xmlns:p14="http://schemas.microsoft.com/office/powerpoint/2010/main" val="13558080"/>
       </p:ext>
     </p:extLst>
   </p:cSld>
@@ -346,13 +323,7 @@
       </p:grpSpPr>
       <p:sp>
         <p:nvSpPr>
-          <p:cNvPr id="2" name="Title 1">
-            <a:extLst>
-              <a:ext uri="{FF2B5EF4-FFF2-40B4-BE49-F238E27FC236}">
-                <a16:creationId xmlns:a16="http://schemas.microsoft.com/office/drawing/2014/main" id="{C1A8725C-D95F-8980-5F6B-DC0787A17A4C}"/>
-              </a:ext>
-            </a:extLst>
-          </p:cNvPr>
+          <p:cNvPr id="2" name="Title 1"/>
           <p:cNvSpPr>
             <a:spLocks noGrp="1"/>
           </p:cNvSpPr>
@@ -369,18 +340,13 @@
               <a:rPr lang="en-US"/>
               <a:t>Click to edit Master title style</a:t>
             </a:r>
-          </a:p>
-        </p:txBody>
-      </p:sp>
-      <p:sp>
-        <p:nvSpPr>
-          <p:cNvPr id="3" name="Vertical Text Placeholder 2">
-            <a:extLst>
-              <a:ext uri="{FF2B5EF4-FFF2-40B4-BE49-F238E27FC236}">
-                <a16:creationId xmlns:a16="http://schemas.microsoft.com/office/drawing/2014/main" id="{B62451E1-A833-712F-2ECA-EEB2414D7E6F}"/>
-              </a:ext>
-            </a:extLst>
-          </p:cNvPr>
+            <a:endParaRPr lang="en-US" dirty="0"/>
+          </a:p>
+        </p:txBody>
+      </p:sp>
+      <p:sp>
+        <p:nvSpPr>
+          <p:cNvPr id="3" name="Vertical Text Placeholder 2"/>
           <p:cNvSpPr>
             <a:spLocks noGrp="1"/>
           </p:cNvSpPr>
@@ -426,18 +392,13 @@
               <a:rPr lang="en-US"/>
               <a:t>Fifth level</a:t>
             </a:r>
-          </a:p>
-        </p:txBody>
-      </p:sp>
-      <p:sp>
-        <p:nvSpPr>
-          <p:cNvPr id="4" name="Date Placeholder 3">
-            <a:extLst>
-              <a:ext uri="{FF2B5EF4-FFF2-40B4-BE49-F238E27FC236}">
-                <a16:creationId xmlns:a16="http://schemas.microsoft.com/office/drawing/2014/main" id="{D9F9FC5D-124B-7749-5781-8211003C06FC}"/>
-              </a:ext>
-            </a:extLst>
-          </p:cNvPr>
+            <a:endParaRPr lang="en-US" dirty="0"/>
+          </a:p>
+        </p:txBody>
+      </p:sp>
+      <p:sp>
+        <p:nvSpPr>
+          <p:cNvPr id="4" name="Date Placeholder 3"/>
           <p:cNvSpPr>
             <a:spLocks noGrp="1"/>
           </p:cNvSpPr>
@@ -452,7 +413,7 @@
           <a:p>
             <a:fld id="{D5673968-EB4A-4ACE-9624-571A35D0F85A}" type="datetimeFigureOut">
               <a:rPr lang="en-US" smtClean="0"/>
-              <a:t>5/9/2026</a:t>
+              <a:t>5/18/2026</a:t>
             </a:fld>
             <a:endParaRPr lang="en-US"/>
           </a:p>
@@ -460,13 +421,7 @@
       </p:sp>
       <p:sp>
         <p:nvSpPr>
-          <p:cNvPr id="5" name="Footer Placeholder 4">
-            <a:extLst>
-              <a:ext uri="{FF2B5EF4-FFF2-40B4-BE49-F238E27FC236}">
-                <a16:creationId xmlns:a16="http://schemas.microsoft.com/office/drawing/2014/main" id="{038AD0A2-2FA2-70CE-6881-B1110736929E}"/>
-              </a:ext>
-            </a:extLst>
-          </p:cNvPr>
+          <p:cNvPr id="5" name="Footer Placeholder 4"/>
           <p:cNvSpPr>
             <a:spLocks noGrp="1"/>
           </p:cNvSpPr>
@@ -485,13 +440,7 @@
       </p:sp>
       <p:sp>
         <p:nvSpPr>
-          <p:cNvPr id="6" name="Slide Number Placeholder 5">
-            <a:extLst>
-              <a:ext uri="{FF2B5EF4-FFF2-40B4-BE49-F238E27FC236}">
-                <a16:creationId xmlns:a16="http://schemas.microsoft.com/office/drawing/2014/main" id="{8581DD29-7E25-1B5C-B677-E830F6718FA6}"/>
-              </a:ext>
-            </a:extLst>
-          </p:cNvPr>
+          <p:cNvPr id="6" name="Slide Number Placeholder 5"/>
           <p:cNvSpPr>
             <a:spLocks noGrp="1"/>
           </p:cNvSpPr>
@@ -515,7 +464,7 @@
     </p:spTree>
     <p:extLst>
       <p:ext uri="{BB962C8B-B14F-4D97-AF65-F5344CB8AC3E}">
-        <p14:creationId xmlns:p14="http://schemas.microsoft.com/office/powerpoint/2010/main" val="3039820557"/>
+        <p14:creationId xmlns:p14="http://schemas.microsoft.com/office/powerpoint/2010/main" val="3936337681"/>
       </p:ext>
     </p:extLst>
   </p:cSld>
@@ -544,13 +493,7 @@
       </p:grpSpPr>
       <p:sp>
         <p:nvSpPr>
-          <p:cNvPr id="2" name="Vertical Title 1">
-            <a:extLst>
-              <a:ext uri="{FF2B5EF4-FFF2-40B4-BE49-F238E27FC236}">
-                <a16:creationId xmlns:a16="http://schemas.microsoft.com/office/drawing/2014/main" id="{FEA40CF8-23E2-5B7F-0585-607A124D904B}"/>
-              </a:ext>
-            </a:extLst>
-          </p:cNvPr>
+          <p:cNvPr id="2" name="Vertical Title 1"/>
           <p:cNvSpPr>
             <a:spLocks noGrp="1"/>
           </p:cNvSpPr>
@@ -560,8 +503,8 @@
         </p:nvSpPr>
         <p:spPr>
           <a:xfrm>
-            <a:off x="8724900" y="365125"/>
-            <a:ext cx="2628900" cy="5811838"/>
+            <a:off x="4907757" y="365125"/>
+            <a:ext cx="1478756" cy="5811838"/>
           </a:xfrm>
         </p:spPr>
         <p:txBody>
@@ -572,18 +515,13 @@
               <a:rPr lang="en-US"/>
               <a:t>Click to edit Master title style</a:t>
             </a:r>
-          </a:p>
-        </p:txBody>
-      </p:sp>
-      <p:sp>
-        <p:nvSpPr>
-          <p:cNvPr id="3" name="Vertical Text Placeholder 2">
-            <a:extLst>
-              <a:ext uri="{FF2B5EF4-FFF2-40B4-BE49-F238E27FC236}">
-                <a16:creationId xmlns:a16="http://schemas.microsoft.com/office/drawing/2014/main" id="{D836C132-2E86-3A98-CA7E-13619A6D44CB}"/>
-              </a:ext>
-            </a:extLst>
-          </p:cNvPr>
+            <a:endParaRPr lang="en-US" dirty="0"/>
+          </a:p>
+        </p:txBody>
+      </p:sp>
+      <p:sp>
+        <p:nvSpPr>
+          <p:cNvPr id="3" name="Vertical Text Placeholder 2"/>
           <p:cNvSpPr>
             <a:spLocks noGrp="1"/>
           </p:cNvSpPr>
@@ -593,8 +531,8 @@
         </p:nvSpPr>
         <p:spPr>
           <a:xfrm>
-            <a:off x="838200" y="365125"/>
-            <a:ext cx="7734300" cy="5811838"/>
+            <a:off x="471488" y="365125"/>
+            <a:ext cx="4350544" cy="5811838"/>
           </a:xfrm>
         </p:spPr>
         <p:txBody>
@@ -634,18 +572,13 @@
               <a:rPr lang="en-US"/>
               <a:t>Fifth level</a:t>
             </a:r>
-          </a:p>
-        </p:txBody>
-      </p:sp>
-      <p:sp>
-        <p:nvSpPr>
-          <p:cNvPr id="4" name="Date Placeholder 3">
-            <a:extLst>
-              <a:ext uri="{FF2B5EF4-FFF2-40B4-BE49-F238E27FC236}">
-                <a16:creationId xmlns:a16="http://schemas.microsoft.com/office/drawing/2014/main" id="{38FA85F0-30C9-C857-0FAF-9B71C6828657}"/>
-              </a:ext>
-            </a:extLst>
-          </p:cNvPr>
+            <a:endParaRPr lang="en-US" dirty="0"/>
+          </a:p>
+        </p:txBody>
+      </p:sp>
+      <p:sp>
+        <p:nvSpPr>
+          <p:cNvPr id="4" name="Date Placeholder 3"/>
           <p:cNvSpPr>
             <a:spLocks noGrp="1"/>
           </p:cNvSpPr>
@@ -660,7 +593,7 @@
           <a:p>
             <a:fld id="{D5673968-EB4A-4ACE-9624-571A35D0F85A}" type="datetimeFigureOut">
               <a:rPr lang="en-US" smtClean="0"/>
-              <a:t>5/9/2026</a:t>
+              <a:t>5/18/2026</a:t>
             </a:fld>
             <a:endParaRPr lang="en-US"/>
           </a:p>
@@ -668,13 +601,7 @@
       </p:sp>
       <p:sp>
         <p:nvSpPr>
-          <p:cNvPr id="5" name="Footer Placeholder 4">
-            <a:extLst>
-              <a:ext uri="{FF2B5EF4-FFF2-40B4-BE49-F238E27FC236}">
-                <a16:creationId xmlns:a16="http://schemas.microsoft.com/office/drawing/2014/main" id="{EC94E4DC-A487-9AD2-5F86-B3B38BAE1395}"/>
-              </a:ext>
-            </a:extLst>
-          </p:cNvPr>
+          <p:cNvPr id="5" name="Footer Placeholder 4"/>
           <p:cNvSpPr>
             <a:spLocks noGrp="1"/>
           </p:cNvSpPr>
@@ -693,13 +620,7 @@
       </p:sp>
       <p:sp>
         <p:nvSpPr>
-          <p:cNvPr id="6" name="Slide Number Placeholder 5">
-            <a:extLst>
-              <a:ext uri="{FF2B5EF4-FFF2-40B4-BE49-F238E27FC236}">
-                <a16:creationId xmlns:a16="http://schemas.microsoft.com/office/drawing/2014/main" id="{AE40DFC4-5164-D3B5-64D8-F0511CED4AD4}"/>
-              </a:ext>
-            </a:extLst>
-          </p:cNvPr>
+          <p:cNvPr id="6" name="Slide Number Placeholder 5"/>
           <p:cNvSpPr>
             <a:spLocks noGrp="1"/>
           </p:cNvSpPr>
@@ -723,7 +644,7 @@
     </p:spTree>
     <p:extLst>
       <p:ext uri="{BB962C8B-B14F-4D97-AF65-F5344CB8AC3E}">
-        <p14:creationId xmlns:p14="http://schemas.microsoft.com/office/powerpoint/2010/main" val="706348276"/>
+        <p14:creationId xmlns:p14="http://schemas.microsoft.com/office/powerpoint/2010/main" val="2266675091"/>
       </p:ext>
     </p:extLst>
   </p:cSld>
@@ -752,13 +673,7 @@
       </p:grpSpPr>
       <p:sp>
         <p:nvSpPr>
-          <p:cNvPr id="2" name="Title 1">
-            <a:extLst>
-              <a:ext uri="{FF2B5EF4-FFF2-40B4-BE49-F238E27FC236}">
-                <a16:creationId xmlns:a16="http://schemas.microsoft.com/office/drawing/2014/main" id="{A7BCB96E-954A-F539-C901-E19A7EA33E51}"/>
-              </a:ext>
-            </a:extLst>
-          </p:cNvPr>
+          <p:cNvPr id="2" name="Title 1"/>
           <p:cNvSpPr>
             <a:spLocks noGrp="1"/>
           </p:cNvSpPr>
@@ -775,18 +690,13 @@
               <a:rPr lang="en-US"/>
               <a:t>Click to edit Master title style</a:t>
             </a:r>
-          </a:p>
-        </p:txBody>
-      </p:sp>
-      <p:sp>
-        <p:nvSpPr>
-          <p:cNvPr id="3" name="Content Placeholder 2">
-            <a:extLst>
-              <a:ext uri="{FF2B5EF4-FFF2-40B4-BE49-F238E27FC236}">
-                <a16:creationId xmlns:a16="http://schemas.microsoft.com/office/drawing/2014/main" id="{6FECC52B-C9E2-B2E1-F9FE-1876C6999111}"/>
-              </a:ext>
-            </a:extLst>
-          </p:cNvPr>
+            <a:endParaRPr lang="en-US" dirty="0"/>
+          </a:p>
+        </p:txBody>
+      </p:sp>
+      <p:sp>
+        <p:nvSpPr>
+          <p:cNvPr id="3" name="Content Placeholder 2"/>
           <p:cNvSpPr>
             <a:spLocks noGrp="1"/>
           </p:cNvSpPr>
@@ -832,18 +742,13 @@
               <a:rPr lang="en-US"/>
               <a:t>Fifth level</a:t>
             </a:r>
-          </a:p>
-        </p:txBody>
-      </p:sp>
-      <p:sp>
-        <p:nvSpPr>
-          <p:cNvPr id="4" name="Date Placeholder 3">
-            <a:extLst>
-              <a:ext uri="{FF2B5EF4-FFF2-40B4-BE49-F238E27FC236}">
-                <a16:creationId xmlns:a16="http://schemas.microsoft.com/office/drawing/2014/main" id="{A2266788-8078-8D63-8BD5-01128510DEBF}"/>
-              </a:ext>
-            </a:extLst>
-          </p:cNvPr>
+            <a:endParaRPr lang="en-US" dirty="0"/>
+          </a:p>
+        </p:txBody>
+      </p:sp>
+      <p:sp>
+        <p:nvSpPr>
+          <p:cNvPr id="4" name="Date Placeholder 3"/>
           <p:cNvSpPr>
             <a:spLocks noGrp="1"/>
           </p:cNvSpPr>
@@ -858,7 +763,7 @@
           <a:p>
             <a:fld id="{D5673968-EB4A-4ACE-9624-571A35D0F85A}" type="datetimeFigureOut">
               <a:rPr lang="en-US" smtClean="0"/>
-              <a:t>5/9/2026</a:t>
+              <a:t>5/18/2026</a:t>
             </a:fld>
             <a:endParaRPr lang="en-US"/>
           </a:p>
@@ -866,13 +771,7 @@
       </p:sp>
       <p:sp>
         <p:nvSpPr>
-          <p:cNvPr id="5" name="Footer Placeholder 4">
-            <a:extLst>
-              <a:ext uri="{FF2B5EF4-FFF2-40B4-BE49-F238E27FC236}">
-                <a16:creationId xmlns:a16="http://schemas.microsoft.com/office/drawing/2014/main" id="{435E3F2C-1731-CFAC-8CCA-5F196D1EA41A}"/>
-              </a:ext>
-            </a:extLst>
-          </p:cNvPr>
+          <p:cNvPr id="5" name="Footer Placeholder 4"/>
           <p:cNvSpPr>
             <a:spLocks noGrp="1"/>
           </p:cNvSpPr>
@@ -891,13 +790,7 @@
       </p:sp>
       <p:sp>
         <p:nvSpPr>
-          <p:cNvPr id="6" name="Slide Number Placeholder 5">
-            <a:extLst>
-              <a:ext uri="{FF2B5EF4-FFF2-40B4-BE49-F238E27FC236}">
-                <a16:creationId xmlns:a16="http://schemas.microsoft.com/office/drawing/2014/main" id="{31F0F4FC-CF13-DC31-AFBB-1834098C999D}"/>
-              </a:ext>
-            </a:extLst>
-          </p:cNvPr>
+          <p:cNvPr id="6" name="Slide Number Placeholder 5"/>
           <p:cNvSpPr>
             <a:spLocks noGrp="1"/>
           </p:cNvSpPr>
@@ -921,7 +814,7 @@
     </p:spTree>
     <p:extLst>
       <p:ext uri="{BB962C8B-B14F-4D97-AF65-F5344CB8AC3E}">
-        <p14:creationId xmlns:p14="http://schemas.microsoft.com/office/powerpoint/2010/main" val="1124311513"/>
+        <p14:creationId xmlns:p14="http://schemas.microsoft.com/office/powerpoint/2010/main" val="3699506637"/>
       </p:ext>
     </p:extLst>
   </p:cSld>
@@ -950,13 +843,7 @@
       </p:grpSpPr>
       <p:sp>
         <p:nvSpPr>
-          <p:cNvPr id="2" name="Title 1">
-            <a:extLst>
-              <a:ext uri="{FF2B5EF4-FFF2-40B4-BE49-F238E27FC236}">
-                <a16:creationId xmlns:a16="http://schemas.microsoft.com/office/drawing/2014/main" id="{EC454D99-D4C0-760B-E17E-12842E8DAC8A}"/>
-              </a:ext>
-            </a:extLst>
-          </p:cNvPr>
+          <p:cNvPr id="2" name="Title 1"/>
           <p:cNvSpPr>
             <a:spLocks noGrp="1"/>
           </p:cNvSpPr>
@@ -966,15 +853,15 @@
         </p:nvSpPr>
         <p:spPr>
           <a:xfrm>
-            <a:off x="831850" y="1709738"/>
-            <a:ext cx="10515600" cy="2852737"/>
+            <a:off x="467916" y="1709740"/>
+            <a:ext cx="5915025" cy="2852737"/>
           </a:xfrm>
         </p:spPr>
         <p:txBody>
           <a:bodyPr anchor="b"/>
           <a:lstStyle>
             <a:lvl1pPr>
-              <a:defRPr sz="6000"/>
+              <a:defRPr sz="4500"/>
             </a:lvl1pPr>
           </a:lstStyle>
           <a:p>
@@ -982,18 +869,13 @@
               <a:rPr lang="en-US"/>
               <a:t>Click to edit Master title style</a:t>
             </a:r>
-          </a:p>
-        </p:txBody>
-      </p:sp>
-      <p:sp>
-        <p:nvSpPr>
-          <p:cNvPr id="3" name="Text Placeholder 2">
-            <a:extLst>
-              <a:ext uri="{FF2B5EF4-FFF2-40B4-BE49-F238E27FC236}">
-                <a16:creationId xmlns:a16="http://schemas.microsoft.com/office/drawing/2014/main" id="{6CEEE7B2-0D27-A562-0E91-BE6DA9FE65A4}"/>
-              </a:ext>
-            </a:extLst>
-          </p:cNvPr>
+            <a:endParaRPr lang="en-US" dirty="0"/>
+          </a:p>
+        </p:txBody>
+      </p:sp>
+      <p:sp>
+        <p:nvSpPr>
+          <p:cNvPr id="3" name="Text Placeholder 2"/>
           <p:cNvSpPr>
             <a:spLocks noGrp="1"/>
           </p:cNvSpPr>
@@ -1003,8 +885,8 @@
         </p:nvSpPr>
         <p:spPr>
           <a:xfrm>
-            <a:off x="831850" y="4589463"/>
-            <a:ext cx="10515600" cy="1500187"/>
+            <a:off x="467916" y="4589465"/>
+            <a:ext cx="5915025" cy="1500187"/>
           </a:xfrm>
         </p:spPr>
         <p:txBody>
@@ -1012,7 +894,7 @@
           <a:lstStyle>
             <a:lvl1pPr marL="0" indent="0">
               <a:buNone/>
-              <a:defRPr sz="2400">
+              <a:defRPr sz="1800">
                 <a:solidFill>
                   <a:schemeClr val="tx1">
                     <a:tint val="82000"/>
@@ -1020,9 +902,9 @@
                 </a:solidFill>
               </a:defRPr>
             </a:lvl1pPr>
-            <a:lvl2pPr marL="457200" indent="0">
-              <a:buNone/>
-              <a:defRPr sz="2000">
+            <a:lvl2pPr marL="342900" indent="0">
+              <a:buNone/>
+              <a:defRPr sz="1500">
                 <a:solidFill>
                   <a:schemeClr val="tx1">
                     <a:tint val="82000"/>
@@ -1030,9 +912,9 @@
                 </a:solidFill>
               </a:defRPr>
             </a:lvl2pPr>
-            <a:lvl3pPr marL="914400" indent="0">
-              <a:buNone/>
-              <a:defRPr sz="1800">
+            <a:lvl3pPr marL="685800" indent="0">
+              <a:buNone/>
+              <a:defRPr sz="1350">
                 <a:solidFill>
                   <a:schemeClr val="tx1">
                     <a:tint val="82000"/>
@@ -1040,9 +922,9 @@
                 </a:solidFill>
               </a:defRPr>
             </a:lvl3pPr>
-            <a:lvl4pPr marL="1371600" indent="0">
-              <a:buNone/>
-              <a:defRPr sz="1600">
+            <a:lvl4pPr marL="1028700" indent="0">
+              <a:buNone/>
+              <a:defRPr sz="1200">
                 <a:solidFill>
                   <a:schemeClr val="tx1">
                     <a:tint val="82000"/>
@@ -1050,9 +932,9 @@
                 </a:solidFill>
               </a:defRPr>
             </a:lvl4pPr>
-            <a:lvl5pPr marL="1828800" indent="0">
-              <a:buNone/>
-              <a:defRPr sz="1600">
+            <a:lvl5pPr marL="1371600" indent="0">
+              <a:buNone/>
+              <a:defRPr sz="1200">
                 <a:solidFill>
                   <a:schemeClr val="tx1">
                     <a:tint val="82000"/>
@@ -1060,9 +942,9 @@
                 </a:solidFill>
               </a:defRPr>
             </a:lvl5pPr>
-            <a:lvl6pPr marL="2286000" indent="0">
-              <a:buNone/>
-              <a:defRPr sz="1600">
+            <a:lvl6pPr marL="1714500" indent="0">
+              <a:buNone/>
+              <a:defRPr sz="1200">
                 <a:solidFill>
                   <a:schemeClr val="tx1">
                     <a:tint val="82000"/>
@@ -1070,9 +952,9 @@
                 </a:solidFill>
               </a:defRPr>
             </a:lvl6pPr>
-            <a:lvl7pPr marL="2743200" indent="0">
-              <a:buNone/>
-              <a:defRPr sz="1600">
+            <a:lvl7pPr marL="2057400" indent="0">
+              <a:buNone/>
+              <a:defRPr sz="1200">
                 <a:solidFill>
                   <a:schemeClr val="tx1">
                     <a:tint val="82000"/>
@@ -1080,9 +962,9 @@
                 </a:solidFill>
               </a:defRPr>
             </a:lvl7pPr>
-            <a:lvl8pPr marL="3200400" indent="0">
-              <a:buNone/>
-              <a:defRPr sz="1600">
+            <a:lvl8pPr marL="2400300" indent="0">
+              <a:buNone/>
+              <a:defRPr sz="1200">
                 <a:solidFill>
                   <a:schemeClr val="tx1">
                     <a:tint val="82000"/>
@@ -1090,9 +972,9 @@
                 </a:solidFill>
               </a:defRPr>
             </a:lvl8pPr>
-            <a:lvl9pPr marL="3657600" indent="0">
-              <a:buNone/>
-              <a:defRPr sz="1600">
+            <a:lvl9pPr marL="2743200" indent="0">
+              <a:buNone/>
+              <a:defRPr sz="1200">
                 <a:solidFill>
                   <a:schemeClr val="tx1">
                     <a:tint val="82000"/>
@@ -1112,13 +994,7 @@
       </p:sp>
       <p:sp>
         <p:nvSpPr>
-          <p:cNvPr id="4" name="Date Placeholder 3">
-            <a:extLst>
-              <a:ext uri="{FF2B5EF4-FFF2-40B4-BE49-F238E27FC236}">
-                <a16:creationId xmlns:a16="http://schemas.microsoft.com/office/drawing/2014/main" id="{C29EF21C-DEB2-967F-A566-5DCF0E64AA6C}"/>
-              </a:ext>
-            </a:extLst>
-          </p:cNvPr>
+          <p:cNvPr id="4" name="Date Placeholder 3"/>
           <p:cNvSpPr>
             <a:spLocks noGrp="1"/>
           </p:cNvSpPr>
@@ -1133,7 +1009,7 @@
           <a:p>
             <a:fld id="{D5673968-EB4A-4ACE-9624-571A35D0F85A}" type="datetimeFigureOut">
               <a:rPr lang="en-US" smtClean="0"/>
-              <a:t>5/9/2026</a:t>
+              <a:t>5/18/2026</a:t>
             </a:fld>
             <a:endParaRPr lang="en-US"/>
           </a:p>
@@ -1141,13 +1017,7 @@
       </p:sp>
       <p:sp>
         <p:nvSpPr>
-          <p:cNvPr id="5" name="Footer Placeholder 4">
-            <a:extLst>
-              <a:ext uri="{FF2B5EF4-FFF2-40B4-BE49-F238E27FC236}">
-                <a16:creationId xmlns:a16="http://schemas.microsoft.com/office/drawing/2014/main" id="{22E23F32-AF2C-58ED-7BC9-92E85BEA383A}"/>
-              </a:ext>
-            </a:extLst>
-          </p:cNvPr>
+          <p:cNvPr id="5" name="Footer Placeholder 4"/>
           <p:cNvSpPr>
             <a:spLocks noGrp="1"/>
           </p:cNvSpPr>
@@ -1166,13 +1036,7 @@
       </p:sp>
       <p:sp>
         <p:nvSpPr>
-          <p:cNvPr id="6" name="Slide Number Placeholder 5">
-            <a:extLst>
-              <a:ext uri="{FF2B5EF4-FFF2-40B4-BE49-F238E27FC236}">
-                <a16:creationId xmlns:a16="http://schemas.microsoft.com/office/drawing/2014/main" id="{F0A04BEB-5120-4BA9-CC99-9644680F2DDE}"/>
-              </a:ext>
-            </a:extLst>
-          </p:cNvPr>
+          <p:cNvPr id="6" name="Slide Number Placeholder 5"/>
           <p:cNvSpPr>
             <a:spLocks noGrp="1"/>
           </p:cNvSpPr>
@@ -1196,7 +1060,7 @@
     </p:spTree>
     <p:extLst>
       <p:ext uri="{BB962C8B-B14F-4D97-AF65-F5344CB8AC3E}">
-        <p14:creationId xmlns:p14="http://schemas.microsoft.com/office/powerpoint/2010/main" val="2953152022"/>
+        <p14:creationId xmlns:p14="http://schemas.microsoft.com/office/powerpoint/2010/main" val="3003399700"/>
       </p:ext>
     </p:extLst>
   </p:cSld>
@@ -1225,13 +1089,7 @@
       </p:grpSpPr>
       <p:sp>
         <p:nvSpPr>
-          <p:cNvPr id="2" name="Title 1">
-            <a:extLst>
-              <a:ext uri="{FF2B5EF4-FFF2-40B4-BE49-F238E27FC236}">
-                <a16:creationId xmlns:a16="http://schemas.microsoft.com/office/drawing/2014/main" id="{BE98A69F-B1A9-412D-816D-18028FA58495}"/>
-              </a:ext>
-            </a:extLst>
-          </p:cNvPr>
+          <p:cNvPr id="2" name="Title 1"/>
           <p:cNvSpPr>
             <a:spLocks noGrp="1"/>
           </p:cNvSpPr>
@@ -1248,18 +1106,13 @@
               <a:rPr lang="en-US"/>
               <a:t>Click to edit Master title style</a:t>
             </a:r>
-          </a:p>
-        </p:txBody>
-      </p:sp>
-      <p:sp>
-        <p:nvSpPr>
-          <p:cNvPr id="3" name="Content Placeholder 2">
-            <a:extLst>
-              <a:ext uri="{FF2B5EF4-FFF2-40B4-BE49-F238E27FC236}">
-                <a16:creationId xmlns:a16="http://schemas.microsoft.com/office/drawing/2014/main" id="{0E5F9DD9-A463-6666-2142-4EF28D9E49B3}"/>
-              </a:ext>
-            </a:extLst>
-          </p:cNvPr>
+            <a:endParaRPr lang="en-US" dirty="0"/>
+          </a:p>
+        </p:txBody>
+      </p:sp>
+      <p:sp>
+        <p:nvSpPr>
+          <p:cNvPr id="3" name="Content Placeholder 2"/>
           <p:cNvSpPr>
             <a:spLocks noGrp="1"/>
           </p:cNvSpPr>
@@ -1269,8 +1122,8 @@
         </p:nvSpPr>
         <p:spPr>
           <a:xfrm>
-            <a:off x="838200" y="1825625"/>
-            <a:ext cx="5181600" cy="4351338"/>
+            <a:off x="471488" y="1825625"/>
+            <a:ext cx="2914650" cy="4351338"/>
           </a:xfrm>
         </p:spPr>
         <p:txBody>
@@ -1310,18 +1163,13 @@
               <a:rPr lang="en-US"/>
               <a:t>Fifth level</a:t>
             </a:r>
-          </a:p>
-        </p:txBody>
-      </p:sp>
-      <p:sp>
-        <p:nvSpPr>
-          <p:cNvPr id="4" name="Content Placeholder 3">
-            <a:extLst>
-              <a:ext uri="{FF2B5EF4-FFF2-40B4-BE49-F238E27FC236}">
-                <a16:creationId xmlns:a16="http://schemas.microsoft.com/office/drawing/2014/main" id="{6D26FB43-A54B-6642-FB55-52FDDA9A2AB9}"/>
-              </a:ext>
-            </a:extLst>
-          </p:cNvPr>
+            <a:endParaRPr lang="en-US" dirty="0"/>
+          </a:p>
+        </p:txBody>
+      </p:sp>
+      <p:sp>
+        <p:nvSpPr>
+          <p:cNvPr id="4" name="Content Placeholder 3"/>
           <p:cNvSpPr>
             <a:spLocks noGrp="1"/>
           </p:cNvSpPr>
@@ -1331,8 +1179,8 @@
         </p:nvSpPr>
         <p:spPr>
           <a:xfrm>
-            <a:off x="6172200" y="1825625"/>
-            <a:ext cx="5181600" cy="4351338"/>
+            <a:off x="3471863" y="1825625"/>
+            <a:ext cx="2914650" cy="4351338"/>
           </a:xfrm>
         </p:spPr>
         <p:txBody>
@@ -1372,18 +1220,13 @@
               <a:rPr lang="en-US"/>
               <a:t>Fifth level</a:t>
             </a:r>
-          </a:p>
-        </p:txBody>
-      </p:sp>
-      <p:sp>
-        <p:nvSpPr>
-          <p:cNvPr id="5" name="Date Placeholder 4">
-            <a:extLst>
-              <a:ext uri="{FF2B5EF4-FFF2-40B4-BE49-F238E27FC236}">
-                <a16:creationId xmlns:a16="http://schemas.microsoft.com/office/drawing/2014/main" id="{E3005823-325A-15A3-CDD1-07DDC9F38B52}"/>
-              </a:ext>
-            </a:extLst>
-          </p:cNvPr>
+            <a:endParaRPr lang="en-US" dirty="0"/>
+          </a:p>
+        </p:txBody>
+      </p:sp>
+      <p:sp>
+        <p:nvSpPr>
+          <p:cNvPr id="5" name="Date Placeholder 4"/>
           <p:cNvSpPr>
             <a:spLocks noGrp="1"/>
           </p:cNvSpPr>
@@ -1398,7 +1241,7 @@
           <a:p>
             <a:fld id="{D5673968-EB4A-4ACE-9624-571A35D0F85A}" type="datetimeFigureOut">
               <a:rPr lang="en-US" smtClean="0"/>
-              <a:t>5/9/2026</a:t>
+              <a:t>5/18/2026</a:t>
             </a:fld>
             <a:endParaRPr lang="en-US"/>
           </a:p>
@@ -1406,13 +1249,7 @@
       </p:sp>
       <p:sp>
         <p:nvSpPr>
-          <p:cNvPr id="6" name="Footer Placeholder 5">
-            <a:extLst>
-              <a:ext uri="{FF2B5EF4-FFF2-40B4-BE49-F238E27FC236}">
-                <a16:creationId xmlns:a16="http://schemas.microsoft.com/office/drawing/2014/main" id="{46410EA2-15C6-19E5-A22E-89FEBA608A3C}"/>
-              </a:ext>
-            </a:extLst>
-          </p:cNvPr>
+          <p:cNvPr id="6" name="Footer Placeholder 5"/>
           <p:cNvSpPr>
             <a:spLocks noGrp="1"/>
           </p:cNvSpPr>
@@ -1431,13 +1268,7 @@
       </p:sp>
       <p:sp>
         <p:nvSpPr>
-          <p:cNvPr id="7" name="Slide Number Placeholder 6">
-            <a:extLst>
-              <a:ext uri="{FF2B5EF4-FFF2-40B4-BE49-F238E27FC236}">
-                <a16:creationId xmlns:a16="http://schemas.microsoft.com/office/drawing/2014/main" id="{4DCFE768-7ED5-5CD4-3C3D-EA4E2F57D3AC}"/>
-              </a:ext>
-            </a:extLst>
-          </p:cNvPr>
+          <p:cNvPr id="7" name="Slide Number Placeholder 6"/>
           <p:cNvSpPr>
             <a:spLocks noGrp="1"/>
           </p:cNvSpPr>
@@ -1461,7 +1292,7 @@
     </p:spTree>
     <p:extLst>
       <p:ext uri="{BB962C8B-B14F-4D97-AF65-F5344CB8AC3E}">
-        <p14:creationId xmlns:p14="http://schemas.microsoft.com/office/powerpoint/2010/main" val="1942039833"/>
+        <p14:creationId xmlns:p14="http://schemas.microsoft.com/office/powerpoint/2010/main" val="3544470244"/>
       </p:ext>
     </p:extLst>
   </p:cSld>
@@ -1490,13 +1321,7 @@
       </p:grpSpPr>
       <p:sp>
         <p:nvSpPr>
-          <p:cNvPr id="2" name="Title 1">
-            <a:extLst>
-              <a:ext uri="{FF2B5EF4-FFF2-40B4-BE49-F238E27FC236}">
-                <a16:creationId xmlns:a16="http://schemas.microsoft.com/office/drawing/2014/main" id="{B6869B7C-2DB5-F378-A3F1-343C30D4120F}"/>
-              </a:ext>
-            </a:extLst>
-          </p:cNvPr>
+          <p:cNvPr id="2" name="Title 1"/>
           <p:cNvSpPr>
             <a:spLocks noGrp="1"/>
           </p:cNvSpPr>
@@ -1506,8 +1331,8 @@
         </p:nvSpPr>
         <p:spPr>
           <a:xfrm>
-            <a:off x="839788" y="365125"/>
-            <a:ext cx="10515600" cy="1325563"/>
+            <a:off x="472381" y="365127"/>
+            <a:ext cx="5915025" cy="1325563"/>
           </a:xfrm>
         </p:spPr>
         <p:txBody>
@@ -1518,18 +1343,13 @@
               <a:rPr lang="en-US"/>
               <a:t>Click to edit Master title style</a:t>
             </a:r>
-          </a:p>
-        </p:txBody>
-      </p:sp>
-      <p:sp>
-        <p:nvSpPr>
-          <p:cNvPr id="3" name="Text Placeholder 2">
-            <a:extLst>
-              <a:ext uri="{FF2B5EF4-FFF2-40B4-BE49-F238E27FC236}">
-                <a16:creationId xmlns:a16="http://schemas.microsoft.com/office/drawing/2014/main" id="{8EBEA2FA-E216-24DE-F721-85ADE5C70C73}"/>
-              </a:ext>
-            </a:extLst>
-          </p:cNvPr>
+            <a:endParaRPr lang="en-US" dirty="0"/>
+          </a:p>
+        </p:txBody>
+      </p:sp>
+      <p:sp>
+        <p:nvSpPr>
+          <p:cNvPr id="3" name="Text Placeholder 2"/>
           <p:cNvSpPr>
             <a:spLocks noGrp="1"/>
           </p:cNvSpPr>
@@ -1539,8 +1359,8 @@
         </p:nvSpPr>
         <p:spPr>
           <a:xfrm>
-            <a:off x="839788" y="1681163"/>
-            <a:ext cx="5157787" cy="823912"/>
+            <a:off x="472381" y="1681163"/>
+            <a:ext cx="2901255" cy="823912"/>
           </a:xfrm>
         </p:spPr>
         <p:txBody>
@@ -1548,39 +1368,39 @@
           <a:lstStyle>
             <a:lvl1pPr marL="0" indent="0">
               <a:buNone/>
-              <a:defRPr sz="2400" b="1"/>
+              <a:defRPr sz="1800" b="1"/>
             </a:lvl1pPr>
-            <a:lvl2pPr marL="457200" indent="0">
-              <a:buNone/>
-              <a:defRPr sz="2000" b="1"/>
+            <a:lvl2pPr marL="342900" indent="0">
+              <a:buNone/>
+              <a:defRPr sz="1500" b="1"/>
             </a:lvl2pPr>
-            <a:lvl3pPr marL="914400" indent="0">
-              <a:buNone/>
-              <a:defRPr sz="1800" b="1"/>
+            <a:lvl3pPr marL="685800" indent="0">
+              <a:buNone/>
+              <a:defRPr sz="1350" b="1"/>
             </a:lvl3pPr>
-            <a:lvl4pPr marL="1371600" indent="0">
-              <a:buNone/>
-              <a:defRPr sz="1600" b="1"/>
+            <a:lvl4pPr marL="1028700" indent="0">
+              <a:buNone/>
+              <a:defRPr sz="1200" b="1"/>
             </a:lvl4pPr>
-            <a:lvl5pPr marL="1828800" indent="0">
-              <a:buNone/>
-              <a:defRPr sz="1600" b="1"/>
+            <a:lvl5pPr marL="1371600" indent="0">
+              <a:buNone/>
+              <a:defRPr sz="1200" b="1"/>
             </a:lvl5pPr>
-            <a:lvl6pPr marL="2286000" indent="0">
-              <a:buNone/>
-              <a:defRPr sz="1600" b="1"/>
+            <a:lvl6pPr marL="1714500" indent="0">
+              <a:buNone/>
+              <a:defRPr sz="1200" b="1"/>
             </a:lvl6pPr>
-            <a:lvl7pPr marL="2743200" indent="0">
-              <a:buNone/>
-              <a:defRPr sz="1600" b="1"/>
+            <a:lvl7pPr marL="2057400" indent="0">
+              <a:buNone/>
+              <a:defRPr sz="1200" b="1"/>
             </a:lvl7pPr>
-            <a:lvl8pPr marL="3200400" indent="0">
-              <a:buNone/>
-              <a:defRPr sz="1600" b="1"/>
+            <a:lvl8pPr marL="2400300" indent="0">
+              <a:buNone/>
+              <a:defRPr sz="1200" b="1"/>
             </a:lvl8pPr>
-            <a:lvl9pPr marL="3657600" indent="0">
-              <a:buNone/>
-              <a:defRPr sz="1600" b="1"/>
+            <a:lvl9pPr marL="2743200" indent="0">
+              <a:buNone/>
+              <a:defRPr sz="1200" b="1"/>
             </a:lvl9pPr>
           </a:lstStyle>
           <a:p>
@@ -1594,13 +1414,7 @@
       </p:sp>
       <p:sp>
         <p:nvSpPr>
-          <p:cNvPr id="4" name="Content Placeholder 3">
-            <a:extLst>
-              <a:ext uri="{FF2B5EF4-FFF2-40B4-BE49-F238E27FC236}">
-                <a16:creationId xmlns:a16="http://schemas.microsoft.com/office/drawing/2014/main" id="{3AE80BCC-65E6-0270-C18A-59F8A678FD48}"/>
-              </a:ext>
-            </a:extLst>
-          </p:cNvPr>
+          <p:cNvPr id="4" name="Content Placeholder 3"/>
           <p:cNvSpPr>
             <a:spLocks noGrp="1"/>
           </p:cNvSpPr>
@@ -1610,8 +1424,8 @@
         </p:nvSpPr>
         <p:spPr>
           <a:xfrm>
-            <a:off x="839788" y="2505075"/>
-            <a:ext cx="5157787" cy="3684588"/>
+            <a:off x="472381" y="2505075"/>
+            <a:ext cx="2901255" cy="3684588"/>
           </a:xfrm>
         </p:spPr>
         <p:txBody>
@@ -1651,18 +1465,13 @@
               <a:rPr lang="en-US"/>
               <a:t>Fifth level</a:t>
             </a:r>
-          </a:p>
-        </p:txBody>
-      </p:sp>
-      <p:sp>
-        <p:nvSpPr>
-          <p:cNvPr id="5" name="Text Placeholder 4">
-            <a:extLst>
-              <a:ext uri="{FF2B5EF4-FFF2-40B4-BE49-F238E27FC236}">
-                <a16:creationId xmlns:a16="http://schemas.microsoft.com/office/drawing/2014/main" id="{0BAB3629-B04D-745E-451F-6E89AAD3630F}"/>
-              </a:ext>
-            </a:extLst>
-          </p:cNvPr>
+            <a:endParaRPr lang="en-US" dirty="0"/>
+          </a:p>
+        </p:txBody>
+      </p:sp>
+      <p:sp>
+        <p:nvSpPr>
+          <p:cNvPr id="5" name="Text Placeholder 4"/>
           <p:cNvSpPr>
             <a:spLocks noGrp="1"/>
           </p:cNvSpPr>
@@ -1672,8 +1481,8 @@
         </p:nvSpPr>
         <p:spPr>
           <a:xfrm>
-            <a:off x="6172200" y="1681163"/>
-            <a:ext cx="5183188" cy="823912"/>
+            <a:off x="3471863" y="1681163"/>
+            <a:ext cx="2915543" cy="823912"/>
           </a:xfrm>
         </p:spPr>
         <p:txBody>
@@ -1681,39 +1490,39 @@
           <a:lstStyle>
             <a:lvl1pPr marL="0" indent="0">
               <a:buNone/>
-              <a:defRPr sz="2400" b="1"/>
+              <a:defRPr sz="1800" b="1"/>
             </a:lvl1pPr>
-            <a:lvl2pPr marL="457200" indent="0">
-              <a:buNone/>
-              <a:defRPr sz="2000" b="1"/>
+            <a:lvl2pPr marL="342900" indent="0">
+              <a:buNone/>
+              <a:defRPr sz="1500" b="1"/>
             </a:lvl2pPr>
-            <a:lvl3pPr marL="914400" indent="0">
-              <a:buNone/>
-              <a:defRPr sz="1800" b="1"/>
+            <a:lvl3pPr marL="685800" indent="0">
+              <a:buNone/>
+              <a:defRPr sz="1350" b="1"/>
             </a:lvl3pPr>
-            <a:lvl4pPr marL="1371600" indent="0">
-              <a:buNone/>
-              <a:defRPr sz="1600" b="1"/>
+            <a:lvl4pPr marL="1028700" indent="0">
+              <a:buNone/>
+              <a:defRPr sz="1200" b="1"/>
             </a:lvl4pPr>
-            <a:lvl5pPr marL="1828800" indent="0">
-              <a:buNone/>
-              <a:defRPr sz="1600" b="1"/>
+            <a:lvl5pPr marL="1371600" indent="0">
+              <a:buNone/>
+              <a:defRPr sz="1200" b="1"/>
             </a:lvl5pPr>
-            <a:lvl6pPr marL="2286000" indent="0">
-              <a:buNone/>
-              <a:defRPr sz="1600" b="1"/>
+            <a:lvl6pPr marL="1714500" indent="0">
+              <a:buNone/>
+              <a:defRPr sz="1200" b="1"/>
             </a:lvl6pPr>
-            <a:lvl7pPr marL="2743200" indent="0">
-              <a:buNone/>
-              <a:defRPr sz="1600" b="1"/>
+            <a:lvl7pPr marL="2057400" indent="0">
+              <a:buNone/>
+              <a:defRPr sz="1200" b="1"/>
             </a:lvl7pPr>
-            <a:lvl8pPr marL="3200400" indent="0">
-              <a:buNone/>
-              <a:defRPr sz="1600" b="1"/>
+            <a:lvl8pPr marL="2400300" indent="0">
+              <a:buNone/>
+              <a:defRPr sz="1200" b="1"/>
             </a:lvl8pPr>
-            <a:lvl9pPr marL="3657600" indent="0">
-              <a:buNone/>
-              <a:defRPr sz="1600" b="1"/>
+            <a:lvl9pPr marL="2743200" indent="0">
+              <a:buNone/>
+              <a:defRPr sz="1200" b="1"/>
             </a:lvl9pPr>
           </a:lstStyle>
           <a:p>
@@ -1727,13 +1536,7 @@
       </p:sp>
       <p:sp>
         <p:nvSpPr>
-          <p:cNvPr id="6" name="Content Placeholder 5">
-            <a:extLst>
-              <a:ext uri="{FF2B5EF4-FFF2-40B4-BE49-F238E27FC236}">
-                <a16:creationId xmlns:a16="http://schemas.microsoft.com/office/drawing/2014/main" id="{062ABCD7-8F86-F07A-881A-DE74BB6643C4}"/>
-              </a:ext>
-            </a:extLst>
-          </p:cNvPr>
+          <p:cNvPr id="6" name="Content Placeholder 5"/>
           <p:cNvSpPr>
             <a:spLocks noGrp="1"/>
           </p:cNvSpPr>
@@ -1743,8 +1546,8 @@
         </p:nvSpPr>
         <p:spPr>
           <a:xfrm>
-            <a:off x="6172200" y="2505075"/>
-            <a:ext cx="5183188" cy="3684588"/>
+            <a:off x="3471863" y="2505075"/>
+            <a:ext cx="2915543" cy="3684588"/>
           </a:xfrm>
         </p:spPr>
         <p:txBody>
@@ -1784,18 +1587,13 @@
               <a:rPr lang="en-US"/>
               <a:t>Fifth level</a:t>
             </a:r>
-          </a:p>
-        </p:txBody>
-      </p:sp>
-      <p:sp>
-        <p:nvSpPr>
-          <p:cNvPr id="7" name="Date Placeholder 6">
-            <a:extLst>
-              <a:ext uri="{FF2B5EF4-FFF2-40B4-BE49-F238E27FC236}">
-                <a16:creationId xmlns:a16="http://schemas.microsoft.com/office/drawing/2014/main" id="{901D9C60-6100-B412-2B0B-046A10870690}"/>
-              </a:ext>
-            </a:extLst>
-          </p:cNvPr>
+            <a:endParaRPr lang="en-US" dirty="0"/>
+          </a:p>
+        </p:txBody>
+      </p:sp>
+      <p:sp>
+        <p:nvSpPr>
+          <p:cNvPr id="7" name="Date Placeholder 6"/>
           <p:cNvSpPr>
             <a:spLocks noGrp="1"/>
           </p:cNvSpPr>
@@ -1810,7 +1608,7 @@
           <a:p>
             <a:fld id="{D5673968-EB4A-4ACE-9624-571A35D0F85A}" type="datetimeFigureOut">
               <a:rPr lang="en-US" smtClean="0"/>
-              <a:t>5/9/2026</a:t>
+              <a:t>5/18/2026</a:t>
             </a:fld>
             <a:endParaRPr lang="en-US"/>
           </a:p>
@@ -1818,13 +1616,7 @@
       </p:sp>
       <p:sp>
         <p:nvSpPr>
-          <p:cNvPr id="8" name="Footer Placeholder 7">
-            <a:extLst>
-              <a:ext uri="{FF2B5EF4-FFF2-40B4-BE49-F238E27FC236}">
-                <a16:creationId xmlns:a16="http://schemas.microsoft.com/office/drawing/2014/main" id="{5B8EFCBC-75BB-BF03-412A-2E24C126F3B2}"/>
-              </a:ext>
-            </a:extLst>
-          </p:cNvPr>
+          <p:cNvPr id="8" name="Footer Placeholder 7"/>
           <p:cNvSpPr>
             <a:spLocks noGrp="1"/>
           </p:cNvSpPr>
@@ -1843,13 +1635,7 @@
       </p:sp>
       <p:sp>
         <p:nvSpPr>
-          <p:cNvPr id="9" name="Slide Number Placeholder 8">
-            <a:extLst>
-              <a:ext uri="{FF2B5EF4-FFF2-40B4-BE49-F238E27FC236}">
-                <a16:creationId xmlns:a16="http://schemas.microsoft.com/office/drawing/2014/main" id="{11333C21-38AB-FAB3-276F-4E6D8FC4F2EE}"/>
-              </a:ext>
-            </a:extLst>
-          </p:cNvPr>
+          <p:cNvPr id="9" name="Slide Number Placeholder 8"/>
           <p:cNvSpPr>
             <a:spLocks noGrp="1"/>
           </p:cNvSpPr>
@@ -1873,7 +1659,7 @@
     </p:spTree>
     <p:extLst>
       <p:ext uri="{BB962C8B-B14F-4D97-AF65-F5344CB8AC3E}">
-        <p14:creationId xmlns:p14="http://schemas.microsoft.com/office/powerpoint/2010/main" val="2680586965"/>
+        <p14:creationId xmlns:p14="http://schemas.microsoft.com/office/powerpoint/2010/main" val="1351300447"/>
       </p:ext>
     </p:extLst>
   </p:cSld>
@@ -1902,13 +1688,7 @@
       </p:grpSpPr>
       <p:sp>
         <p:nvSpPr>
-          <p:cNvPr id="2" name="Title 1">
-            <a:extLst>
-              <a:ext uri="{FF2B5EF4-FFF2-40B4-BE49-F238E27FC236}">
-                <a16:creationId xmlns:a16="http://schemas.microsoft.com/office/drawing/2014/main" id="{C722A347-EBFE-B711-BD51-AC519D3A450B}"/>
-              </a:ext>
-            </a:extLst>
-          </p:cNvPr>
+          <p:cNvPr id="2" name="Title 1"/>
           <p:cNvSpPr>
             <a:spLocks noGrp="1"/>
           </p:cNvSpPr>
@@ -1925,18 +1705,13 @@
               <a:rPr lang="en-US"/>
               <a:t>Click to edit Master title style</a:t>
             </a:r>
-          </a:p>
-        </p:txBody>
-      </p:sp>
-      <p:sp>
-        <p:nvSpPr>
-          <p:cNvPr id="3" name="Date Placeholder 2">
-            <a:extLst>
-              <a:ext uri="{FF2B5EF4-FFF2-40B4-BE49-F238E27FC236}">
-                <a16:creationId xmlns:a16="http://schemas.microsoft.com/office/drawing/2014/main" id="{36C2B38A-69C5-5A2C-C04C-095594408E0A}"/>
-              </a:ext>
-            </a:extLst>
-          </p:cNvPr>
+            <a:endParaRPr lang="en-US" dirty="0"/>
+          </a:p>
+        </p:txBody>
+      </p:sp>
+      <p:sp>
+        <p:nvSpPr>
+          <p:cNvPr id="3" name="Date Placeholder 2"/>
           <p:cNvSpPr>
             <a:spLocks noGrp="1"/>
           </p:cNvSpPr>
@@ -1951,7 +1726,7 @@
           <a:p>
             <a:fld id="{D5673968-EB4A-4ACE-9624-571A35D0F85A}" type="datetimeFigureOut">
               <a:rPr lang="en-US" smtClean="0"/>
-              <a:t>5/9/2026</a:t>
+              <a:t>5/18/2026</a:t>
             </a:fld>
             <a:endParaRPr lang="en-US"/>
           </a:p>
@@ -1959,13 +1734,7 @@
       </p:sp>
       <p:sp>
         <p:nvSpPr>
-          <p:cNvPr id="4" name="Footer Placeholder 3">
-            <a:extLst>
-              <a:ext uri="{FF2B5EF4-FFF2-40B4-BE49-F238E27FC236}">
-                <a16:creationId xmlns:a16="http://schemas.microsoft.com/office/drawing/2014/main" id="{CEC5E1DF-6E2B-E0CC-8862-579D5DA4D15F}"/>
-              </a:ext>
-            </a:extLst>
-          </p:cNvPr>
+          <p:cNvPr id="4" name="Footer Placeholder 3"/>
           <p:cNvSpPr>
             <a:spLocks noGrp="1"/>
           </p:cNvSpPr>
@@ -1984,13 +1753,7 @@
       </p:sp>
       <p:sp>
         <p:nvSpPr>
-          <p:cNvPr id="5" name="Slide Number Placeholder 4">
-            <a:extLst>
-              <a:ext uri="{FF2B5EF4-FFF2-40B4-BE49-F238E27FC236}">
-                <a16:creationId xmlns:a16="http://schemas.microsoft.com/office/drawing/2014/main" id="{4BBB9870-D6E8-05F9-F879-35AEE134264D}"/>
-              </a:ext>
-            </a:extLst>
-          </p:cNvPr>
+          <p:cNvPr id="5" name="Slide Number Placeholder 4"/>
           <p:cNvSpPr>
             <a:spLocks noGrp="1"/>
           </p:cNvSpPr>
@@ -2014,7 +1777,7 @@
     </p:spTree>
     <p:extLst>
       <p:ext uri="{BB962C8B-B14F-4D97-AF65-F5344CB8AC3E}">
-        <p14:creationId xmlns:p14="http://schemas.microsoft.com/office/powerpoint/2010/main" val="628670368"/>
+        <p14:creationId xmlns:p14="http://schemas.microsoft.com/office/powerpoint/2010/main" val="1442281894"/>
       </p:ext>
     </p:extLst>
   </p:cSld>
@@ -2043,13 +1806,7 @@
       </p:grpSpPr>
       <p:sp>
         <p:nvSpPr>
-          <p:cNvPr id="2" name="Date Placeholder 1">
-            <a:extLst>
-              <a:ext uri="{FF2B5EF4-FFF2-40B4-BE49-F238E27FC236}">
-                <a16:creationId xmlns:a16="http://schemas.microsoft.com/office/drawing/2014/main" id="{4FDE9F92-4B60-E593-1183-7A4CF4CD50BE}"/>
-              </a:ext>
-            </a:extLst>
-          </p:cNvPr>
+          <p:cNvPr id="2" name="Date Placeholder 1"/>
           <p:cNvSpPr>
             <a:spLocks noGrp="1"/>
           </p:cNvSpPr>
@@ -2064,7 +1821,7 @@
           <a:p>
             <a:fld id="{D5673968-EB4A-4ACE-9624-571A35D0F85A}" type="datetimeFigureOut">
               <a:rPr lang="en-US" smtClean="0"/>
-              <a:t>5/9/2026</a:t>
+              <a:t>5/18/2026</a:t>
             </a:fld>
             <a:endParaRPr lang="en-US"/>
           </a:p>
@@ -2072,13 +1829,7 @@
       </p:sp>
       <p:sp>
         <p:nvSpPr>
-          <p:cNvPr id="3" name="Footer Placeholder 2">
-            <a:extLst>
-              <a:ext uri="{FF2B5EF4-FFF2-40B4-BE49-F238E27FC236}">
-                <a16:creationId xmlns:a16="http://schemas.microsoft.com/office/drawing/2014/main" id="{F180027B-1797-D982-B664-6608BA344A29}"/>
-              </a:ext>
-            </a:extLst>
-          </p:cNvPr>
+          <p:cNvPr id="3" name="Footer Placeholder 2"/>
           <p:cNvSpPr>
             <a:spLocks noGrp="1"/>
           </p:cNvSpPr>
@@ -2097,13 +1848,7 @@
       </p:sp>
       <p:sp>
         <p:nvSpPr>
-          <p:cNvPr id="4" name="Slide Number Placeholder 3">
-            <a:extLst>
-              <a:ext uri="{FF2B5EF4-FFF2-40B4-BE49-F238E27FC236}">
-                <a16:creationId xmlns:a16="http://schemas.microsoft.com/office/drawing/2014/main" id="{83BF51CC-E0D3-6BA2-DA8F-B24EF6574322}"/>
-              </a:ext>
-            </a:extLst>
-          </p:cNvPr>
+          <p:cNvPr id="4" name="Slide Number Placeholder 3"/>
           <p:cNvSpPr>
             <a:spLocks noGrp="1"/>
           </p:cNvSpPr>
@@ -2127,7 +1872,7 @@
     </p:spTree>
     <p:extLst>
       <p:ext uri="{BB962C8B-B14F-4D97-AF65-F5344CB8AC3E}">
-        <p14:creationId xmlns:p14="http://schemas.microsoft.com/office/powerpoint/2010/main" val="679956310"/>
+        <p14:creationId xmlns:p14="http://schemas.microsoft.com/office/powerpoint/2010/main" val="4116442644"/>
       </p:ext>
     </p:extLst>
   </p:cSld>
@@ -2156,13 +1901,7 @@
       </p:grpSpPr>
       <p:sp>
         <p:nvSpPr>
-          <p:cNvPr id="2" name="Title 1">
-            <a:extLst>
-              <a:ext uri="{FF2B5EF4-FFF2-40B4-BE49-F238E27FC236}">
-                <a16:creationId xmlns:a16="http://schemas.microsoft.com/office/drawing/2014/main" id="{5ECD0B1F-17D1-A58F-617C-82C973F8430B}"/>
-              </a:ext>
-            </a:extLst>
-          </p:cNvPr>
+          <p:cNvPr id="2" name="Title 1"/>
           <p:cNvSpPr>
             <a:spLocks noGrp="1"/>
           </p:cNvSpPr>
@@ -2172,15 +1911,15 @@
         </p:nvSpPr>
         <p:spPr>
           <a:xfrm>
-            <a:off x="839788" y="457200"/>
-            <a:ext cx="3932237" cy="1600200"/>
+            <a:off x="472381" y="457200"/>
+            <a:ext cx="2211884" cy="1600200"/>
           </a:xfrm>
         </p:spPr>
         <p:txBody>
           <a:bodyPr anchor="b"/>
           <a:lstStyle>
             <a:lvl1pPr>
-              <a:defRPr sz="3200"/>
+              <a:defRPr sz="2400"/>
             </a:lvl1pPr>
           </a:lstStyle>
           <a:p>
@@ -2188,18 +1927,13 @@
               <a:rPr lang="en-US"/>
               <a:t>Click to edit Master title style</a:t>
             </a:r>
-          </a:p>
-        </p:txBody>
-      </p:sp>
-      <p:sp>
-        <p:nvSpPr>
-          <p:cNvPr id="3" name="Content Placeholder 2">
-            <a:extLst>
-              <a:ext uri="{FF2B5EF4-FFF2-40B4-BE49-F238E27FC236}">
-                <a16:creationId xmlns:a16="http://schemas.microsoft.com/office/drawing/2014/main" id="{4C0463C0-0B00-D68C-7960-CA0AFC437555}"/>
-              </a:ext>
-            </a:extLst>
-          </p:cNvPr>
+            <a:endParaRPr lang="en-US" dirty="0"/>
+          </a:p>
+        </p:txBody>
+      </p:sp>
+      <p:sp>
+        <p:nvSpPr>
+          <p:cNvPr id="3" name="Content Placeholder 2"/>
           <p:cNvSpPr>
             <a:spLocks noGrp="1"/>
           </p:cNvSpPr>
@@ -2209,39 +1943,39 @@
         </p:nvSpPr>
         <p:spPr>
           <a:xfrm>
-            <a:off x="5183188" y="987425"/>
-            <a:ext cx="6172200" cy="4873625"/>
+            <a:off x="2915543" y="987427"/>
+            <a:ext cx="3471863" cy="4873625"/>
           </a:xfrm>
         </p:spPr>
         <p:txBody>
           <a:bodyPr/>
           <a:lstStyle>
             <a:lvl1pPr>
-              <a:defRPr sz="3200"/>
+              <a:defRPr sz="2400"/>
             </a:lvl1pPr>
             <a:lvl2pPr>
-              <a:defRPr sz="2800"/>
+              <a:defRPr sz="2100"/>
             </a:lvl2pPr>
             <a:lvl3pPr>
-              <a:defRPr sz="2400"/>
+              <a:defRPr sz="1800"/>
             </a:lvl3pPr>
             <a:lvl4pPr>
-              <a:defRPr sz="2000"/>
+              <a:defRPr sz="1500"/>
             </a:lvl4pPr>
             <a:lvl5pPr>
-              <a:defRPr sz="2000"/>
+              <a:defRPr sz="1500"/>
             </a:lvl5pPr>
             <a:lvl6pPr>
-              <a:defRPr sz="2000"/>
+              <a:defRPr sz="1500"/>
             </a:lvl6pPr>
             <a:lvl7pPr>
-              <a:defRPr sz="2000"/>
+              <a:defRPr sz="1500"/>
             </a:lvl7pPr>
             <a:lvl8pPr>
-              <a:defRPr sz="2000"/>
+              <a:defRPr sz="1500"/>
             </a:lvl8pPr>
             <a:lvl9pPr>
-              <a:defRPr sz="2000"/>
+              <a:defRPr sz="1500"/>
             </a:lvl9pPr>
           </a:lstStyle>
           <a:p>
@@ -2278,18 +2012,13 @@
               <a:rPr lang="en-US"/>
               <a:t>Fifth level</a:t>
             </a:r>
-          </a:p>
-        </p:txBody>
-      </p:sp>
-      <p:sp>
-        <p:nvSpPr>
-          <p:cNvPr id="4" name="Text Placeholder 3">
-            <a:extLst>
-              <a:ext uri="{FF2B5EF4-FFF2-40B4-BE49-F238E27FC236}">
-                <a16:creationId xmlns:a16="http://schemas.microsoft.com/office/drawing/2014/main" id="{1405D754-2C49-B0C5-B799-8DA55B384749}"/>
-              </a:ext>
-            </a:extLst>
-          </p:cNvPr>
+            <a:endParaRPr lang="en-US" dirty="0"/>
+          </a:p>
+        </p:txBody>
+      </p:sp>
+      <p:sp>
+        <p:nvSpPr>
+          <p:cNvPr id="4" name="Text Placeholder 3"/>
           <p:cNvSpPr>
             <a:spLocks noGrp="1"/>
           </p:cNvSpPr>
@@ -2299,8 +2028,8 @@
         </p:nvSpPr>
         <p:spPr>
           <a:xfrm>
-            <a:off x="839788" y="2057400"/>
-            <a:ext cx="3932237" cy="3811588"/>
+            <a:off x="472381" y="2057400"/>
+            <a:ext cx="2211884" cy="3811588"/>
           </a:xfrm>
         </p:spPr>
         <p:txBody>
@@ -2308,39 +2037,39 @@
           <a:lstStyle>
             <a:lvl1pPr marL="0" indent="0">
               <a:buNone/>
-              <a:defRPr sz="1600"/>
+              <a:defRPr sz="1200"/>
             </a:lvl1pPr>
-            <a:lvl2pPr marL="457200" indent="0">
-              <a:buNone/>
-              <a:defRPr sz="1400"/>
+            <a:lvl2pPr marL="342900" indent="0">
+              <a:buNone/>
+              <a:defRPr sz="1050"/>
             </a:lvl2pPr>
-            <a:lvl3pPr marL="914400" indent="0">
-              <a:buNone/>
-              <a:defRPr sz="1200"/>
+            <a:lvl3pPr marL="685800" indent="0">
+              <a:buNone/>
+              <a:defRPr sz="900"/>
             </a:lvl3pPr>
-            <a:lvl4pPr marL="1371600" indent="0">
-              <a:buNone/>
-              <a:defRPr sz="1000"/>
+            <a:lvl4pPr marL="1028700" indent="0">
+              <a:buNone/>
+              <a:defRPr sz="750"/>
             </a:lvl4pPr>
-            <a:lvl5pPr marL="1828800" indent="0">
-              <a:buNone/>
-              <a:defRPr sz="1000"/>
+            <a:lvl5pPr marL="1371600" indent="0">
+              <a:buNone/>
+              <a:defRPr sz="750"/>
             </a:lvl5pPr>
-            <a:lvl6pPr marL="2286000" indent="0">
-              <a:buNone/>
-              <a:defRPr sz="1000"/>
+            <a:lvl6pPr marL="1714500" indent="0">
+              <a:buNone/>
+              <a:defRPr sz="750"/>
             </a:lvl6pPr>
-            <a:lvl7pPr marL="2743200" indent="0">
-              <a:buNone/>
-              <a:defRPr sz="1000"/>
+            <a:lvl7pPr marL="2057400" indent="0">
+              <a:buNone/>
+              <a:defRPr sz="750"/>
             </a:lvl7pPr>
-            <a:lvl8pPr marL="3200400" indent="0">
-              <a:buNone/>
-              <a:defRPr sz="1000"/>
+            <a:lvl8pPr marL="2400300" indent="0">
+              <a:buNone/>
+              <a:defRPr sz="750"/>
             </a:lvl8pPr>
-            <a:lvl9pPr marL="3657600" indent="0">
-              <a:buNone/>
-              <a:defRPr sz="1000"/>
+            <a:lvl9pPr marL="2743200" indent="0">
+              <a:buNone/>
+              <a:defRPr sz="750"/>
             </a:lvl9pPr>
           </a:lstStyle>
           <a:p>
@@ -2354,13 +2083,7 @@
       </p:sp>
       <p:sp>
         <p:nvSpPr>
-          <p:cNvPr id="5" name="Date Placeholder 4">
-            <a:extLst>
-              <a:ext uri="{FF2B5EF4-FFF2-40B4-BE49-F238E27FC236}">
-                <a16:creationId xmlns:a16="http://schemas.microsoft.com/office/drawing/2014/main" id="{8BEE93FC-3BDC-D0CE-05FA-1F05CB67DA8F}"/>
-              </a:ext>
-            </a:extLst>
-          </p:cNvPr>
+          <p:cNvPr id="5" name="Date Placeholder 4"/>
           <p:cNvSpPr>
             <a:spLocks noGrp="1"/>
           </p:cNvSpPr>
@@ -2375,7 +2098,7 @@
           <a:p>
             <a:fld id="{D5673968-EB4A-4ACE-9624-571A35D0F85A}" type="datetimeFigureOut">
               <a:rPr lang="en-US" smtClean="0"/>
-              <a:t>5/9/2026</a:t>
+              <a:t>5/18/2026</a:t>
             </a:fld>
             <a:endParaRPr lang="en-US"/>
           </a:p>
@@ -2383,13 +2106,7 @@
       </p:sp>
       <p:sp>
         <p:nvSpPr>
-          <p:cNvPr id="6" name="Footer Placeholder 5">
-            <a:extLst>
-              <a:ext uri="{FF2B5EF4-FFF2-40B4-BE49-F238E27FC236}">
-                <a16:creationId xmlns:a16="http://schemas.microsoft.com/office/drawing/2014/main" id="{8C4B91D1-2A00-6D0A-2C23-9B38DB3C954F}"/>
-              </a:ext>
-            </a:extLst>
-          </p:cNvPr>
+          <p:cNvPr id="6" name="Footer Placeholder 5"/>
           <p:cNvSpPr>
             <a:spLocks noGrp="1"/>
           </p:cNvSpPr>
@@ -2408,13 +2125,7 @@
       </p:sp>
       <p:sp>
         <p:nvSpPr>
-          <p:cNvPr id="7" name="Slide Number Placeholder 6">
-            <a:extLst>
-              <a:ext uri="{FF2B5EF4-FFF2-40B4-BE49-F238E27FC236}">
-                <a16:creationId xmlns:a16="http://schemas.microsoft.com/office/drawing/2014/main" id="{97A3A3C1-9215-6AAA-1A39-05ED3BD3A497}"/>
-              </a:ext>
-            </a:extLst>
-          </p:cNvPr>
+          <p:cNvPr id="7" name="Slide Number Placeholder 6"/>
           <p:cNvSpPr>
             <a:spLocks noGrp="1"/>
           </p:cNvSpPr>
@@ -2438,7 +2149,7 @@
     </p:spTree>
     <p:extLst>
       <p:ext uri="{BB962C8B-B14F-4D97-AF65-F5344CB8AC3E}">
-        <p14:creationId xmlns:p14="http://schemas.microsoft.com/office/powerpoint/2010/main" val="2843443887"/>
+        <p14:creationId xmlns:p14="http://schemas.microsoft.com/office/powerpoint/2010/main" val="3198005022"/>
       </p:ext>
     </p:extLst>
   </p:cSld>
@@ -2467,13 +2178,7 @@
       </p:grpSpPr>
       <p:sp>
         <p:nvSpPr>
-          <p:cNvPr id="2" name="Title 1">
-            <a:extLst>
-              <a:ext uri="{FF2B5EF4-FFF2-40B4-BE49-F238E27FC236}">
-                <a16:creationId xmlns:a16="http://schemas.microsoft.com/office/drawing/2014/main" id="{DD43BE31-AFEE-13B0-C11A-9B1B8539871D}"/>
-              </a:ext>
-            </a:extLst>
-          </p:cNvPr>
+          <p:cNvPr id="2" name="Title 1"/>
           <p:cNvSpPr>
             <a:spLocks noGrp="1"/>
           </p:cNvSpPr>
@@ -2483,15 +2188,15 @@
         </p:nvSpPr>
         <p:spPr>
           <a:xfrm>
-            <a:off x="839788" y="457200"/>
-            <a:ext cx="3932237" cy="1600200"/>
+            <a:off x="472381" y="457200"/>
+            <a:ext cx="2211884" cy="1600200"/>
           </a:xfrm>
         </p:spPr>
         <p:txBody>
           <a:bodyPr anchor="b"/>
           <a:lstStyle>
             <a:lvl1pPr>
-              <a:defRPr sz="3200"/>
+              <a:defRPr sz="2400"/>
             </a:lvl1pPr>
           </a:lstStyle>
           <a:p>
@@ -2499,20 +2204,15 @@
               <a:rPr lang="en-US"/>
               <a:t>Click to edit Master title style</a:t>
             </a:r>
-          </a:p>
-        </p:txBody>
-      </p:sp>
-      <p:sp>
-        <p:nvSpPr>
-          <p:cNvPr id="3" name="Picture Placeholder 2">
-            <a:extLst>
-              <a:ext uri="{FF2B5EF4-FFF2-40B4-BE49-F238E27FC236}">
-                <a16:creationId xmlns:a16="http://schemas.microsoft.com/office/drawing/2014/main" id="{191685B5-6A4A-57D6-55BA-D635F003749D}"/>
-              </a:ext>
-            </a:extLst>
-          </p:cNvPr>
-          <p:cNvSpPr>
-            <a:spLocks noGrp="1"/>
+            <a:endParaRPr lang="en-US" dirty="0"/>
+          </a:p>
+        </p:txBody>
+      </p:sp>
+      <p:sp>
+        <p:nvSpPr>
+          <p:cNvPr id="3" name="Picture Placeholder 2"/>
+          <p:cNvSpPr>
+            <a:spLocks noGrp="1" noChangeAspect="1"/>
           </p:cNvSpPr>
           <p:nvPr>
             <p:ph type="pic" idx="1"/>
@@ -2520,64 +2220,62 @@
         </p:nvSpPr>
         <p:spPr>
           <a:xfrm>
-            <a:off x="5183188" y="987425"/>
-            <a:ext cx="6172200" cy="4873625"/>
+            <a:off x="2915543" y="987427"/>
+            <a:ext cx="3471863" cy="4873625"/>
           </a:xfrm>
         </p:spPr>
         <p:txBody>
-          <a:bodyPr/>
+          <a:bodyPr anchor="t"/>
           <a:lstStyle>
             <a:lvl1pPr marL="0" indent="0">
               <a:buNone/>
-              <a:defRPr sz="3200"/>
+              <a:defRPr sz="2400"/>
             </a:lvl1pPr>
-            <a:lvl2pPr marL="457200" indent="0">
-              <a:buNone/>
-              <a:defRPr sz="2800"/>
+            <a:lvl2pPr marL="342900" indent="0">
+              <a:buNone/>
+              <a:defRPr sz="2100"/>
             </a:lvl2pPr>
-            <a:lvl3pPr marL="914400" indent="0">
-              <a:buNone/>
-              <a:defRPr sz="2400"/>
+            <a:lvl3pPr marL="685800" indent="0">
+              <a:buNone/>
+              <a:defRPr sz="1800"/>
             </a:lvl3pPr>
-            <a:lvl4pPr marL="1371600" indent="0">
-              <a:buNone/>
-              <a:defRPr sz="2000"/>
+            <a:lvl4pPr marL="1028700" indent="0">
+              <a:buNone/>
+              <a:defRPr sz="1500"/>
             </a:lvl4pPr>
-            <a:lvl5pPr marL="1828800" indent="0">
-              <a:buNone/>
-              <a:defRPr sz="2000"/>
+            <a:lvl5pPr marL="1371600" indent="0">
+              <a:buNone/>
+              <a:defRPr sz="1500"/>
             </a:lvl5pPr>
-            <a:lvl6pPr marL="2286000" indent="0">
-              <a:buNone/>
-              <a:defRPr sz="2000"/>
+            <a:lvl6pPr marL="1714500" indent="0">
+              <a:buNone/>
+              <a:defRPr sz="1500"/>
             </a:lvl6pPr>
-            <a:lvl7pPr marL="2743200" indent="0">
-              <a:buNone/>
-              <a:defRPr sz="2000"/>
+            <a:lvl7pPr marL="2057400" indent="0">
+              <a:buNone/>
+              <a:defRPr sz="1500"/>
             </a:lvl7pPr>
-            <a:lvl8pPr marL="3200400" indent="0">
-              <a:buNone/>
-              <a:defRPr sz="2000"/>
+            <a:lvl8pPr marL="2400300" indent="0">
+              <a:buNone/>
+              <a:defRPr sz="1500"/>
             </a:lvl8pPr>
-            <a:lvl9pPr marL="3657600" indent="0">
-              <a:buNone/>
-              <a:defRPr sz="2000"/>
+            <a:lvl9pPr marL="2743200" indent="0">
+              <a:buNone/>
+              <a:defRPr sz="1500"/>
             </a:lvl9pPr>
           </a:lstStyle>
           <a:p>
-            <a:endParaRPr lang="en-US"/>
-          </a:p>
-        </p:txBody>
-      </p:sp>
-      <p:sp>
-        <p:nvSpPr>
-          <p:cNvPr id="4" name="Text Placeholder 3">
-            <a:extLst>
-              <a:ext uri="{FF2B5EF4-FFF2-40B4-BE49-F238E27FC236}">
-                <a16:creationId xmlns:a16="http://schemas.microsoft.com/office/drawing/2014/main" id="{FC4837E0-2F82-C0BB-73BF-29CE2DFBB9FD}"/>
-              </a:ext>
-            </a:extLst>
-          </p:cNvPr>
+            <a:r>
+              <a:rPr lang="en-US"/>
+              <a:t>Click icon to add picture</a:t>
+            </a:r>
+            <a:endParaRPr lang="en-US" dirty="0"/>
+          </a:p>
+        </p:txBody>
+      </p:sp>
+      <p:sp>
+        <p:nvSpPr>
+          <p:cNvPr id="4" name="Text Placeholder 3"/>
           <p:cNvSpPr>
             <a:spLocks noGrp="1"/>
           </p:cNvSpPr>
@@ -2587,8 +2285,8 @@
         </p:nvSpPr>
         <p:spPr>
           <a:xfrm>
-            <a:off x="839788" y="2057400"/>
-            <a:ext cx="3932237" cy="3811588"/>
+            <a:off x="472381" y="2057400"/>
+            <a:ext cx="2211884" cy="3811588"/>
           </a:xfrm>
         </p:spPr>
         <p:txBody>
@@ -2596,39 +2294,39 @@
           <a:lstStyle>
             <a:lvl1pPr marL="0" indent="0">
               <a:buNone/>
-              <a:defRPr sz="1600"/>
+              <a:defRPr sz="1200"/>
             </a:lvl1pPr>
-            <a:lvl2pPr marL="457200" indent="0">
-              <a:buNone/>
-              <a:defRPr sz="1400"/>
+            <a:lvl2pPr marL="342900" indent="0">
+              <a:buNone/>
+              <a:defRPr sz="1050"/>
             </a:lvl2pPr>
-            <a:lvl3pPr marL="914400" indent="0">
-              <a:buNone/>
-              <a:defRPr sz="1200"/>
+            <a:lvl3pPr marL="685800" indent="0">
+              <a:buNone/>
+              <a:defRPr sz="900"/>
             </a:lvl3pPr>
-            <a:lvl4pPr marL="1371600" indent="0">
-              <a:buNone/>
-              <a:defRPr sz="1000"/>
+            <a:lvl4pPr marL="1028700" indent="0">
+              <a:buNone/>
+              <a:defRPr sz="750"/>
             </a:lvl4pPr>
-            <a:lvl5pPr marL="1828800" indent="0">
-              <a:buNone/>
-              <a:defRPr sz="1000"/>
+            <a:lvl5pPr marL="1371600" indent="0">
+              <a:buNone/>
+              <a:defRPr sz="750"/>
             </a:lvl5pPr>
-            <a:lvl6pPr marL="2286000" indent="0">
-              <a:buNone/>
-              <a:defRPr sz="1000"/>
+            <a:lvl6pPr marL="1714500" indent="0">
+              <a:buNone/>
+              <a:defRPr sz="750"/>
             </a:lvl6pPr>
-            <a:lvl7pPr marL="2743200" indent="0">
-              <a:buNone/>
-              <a:defRPr sz="1000"/>
+            <a:lvl7pPr marL="2057400" indent="0">
+              <a:buNone/>
+              <a:defRPr sz="750"/>
             </a:lvl7pPr>
-            <a:lvl8pPr marL="3200400" indent="0">
-              <a:buNone/>
-              <a:defRPr sz="1000"/>
+            <a:lvl8pPr marL="2400300" indent="0">
+              <a:buNone/>
+              <a:defRPr sz="750"/>
             </a:lvl8pPr>
-            <a:lvl9pPr marL="3657600" indent="0">
-              <a:buNone/>
-              <a:defRPr sz="1000"/>
+            <a:lvl9pPr marL="2743200" indent="0">
+              <a:buNone/>
+              <a:defRPr sz="750"/>
             </a:lvl9pPr>
           </a:lstStyle>
           <a:p>
@@ -2642,13 +2340,7 @@
       </p:sp>
       <p:sp>
         <p:nvSpPr>
-          <p:cNvPr id="5" name="Date Placeholder 4">
-            <a:extLst>
-              <a:ext uri="{FF2B5EF4-FFF2-40B4-BE49-F238E27FC236}">
-                <a16:creationId xmlns:a16="http://schemas.microsoft.com/office/drawing/2014/main" id="{50371313-E80B-D58F-E7E4-5BB37933ED1B}"/>
-              </a:ext>
-            </a:extLst>
-          </p:cNvPr>
+          <p:cNvPr id="5" name="Date Placeholder 4"/>
           <p:cNvSpPr>
             <a:spLocks noGrp="1"/>
           </p:cNvSpPr>
@@ -2663,7 +2355,7 @@
           <a:p>
             <a:fld id="{D5673968-EB4A-4ACE-9624-571A35D0F85A}" type="datetimeFigureOut">
               <a:rPr lang="en-US" smtClean="0"/>
-              <a:t>5/9/2026</a:t>
+              <a:t>5/18/2026</a:t>
             </a:fld>
             <a:endParaRPr lang="en-US"/>
           </a:p>
@@ -2671,13 +2363,7 @@
       </p:sp>
       <p:sp>
         <p:nvSpPr>
-          <p:cNvPr id="6" name="Footer Placeholder 5">
-            <a:extLst>
-              <a:ext uri="{FF2B5EF4-FFF2-40B4-BE49-F238E27FC236}">
-                <a16:creationId xmlns:a16="http://schemas.microsoft.com/office/drawing/2014/main" id="{15684C9D-52A3-A6D4-A773-CC40BD4B4EF9}"/>
-              </a:ext>
-            </a:extLst>
-          </p:cNvPr>
+          <p:cNvPr id="6" name="Footer Placeholder 5"/>
           <p:cNvSpPr>
             <a:spLocks noGrp="1"/>
           </p:cNvSpPr>
@@ -2696,13 +2382,7 @@
       </p:sp>
       <p:sp>
         <p:nvSpPr>
-          <p:cNvPr id="7" name="Slide Number Placeholder 6">
-            <a:extLst>
-              <a:ext uri="{FF2B5EF4-FFF2-40B4-BE49-F238E27FC236}">
-                <a16:creationId xmlns:a16="http://schemas.microsoft.com/office/drawing/2014/main" id="{2042A5F9-8CFC-C384-CDA0-BCB0EE2D293C}"/>
-              </a:ext>
-            </a:extLst>
-          </p:cNvPr>
+          <p:cNvPr id="7" name="Slide Number Placeholder 6"/>
           <p:cNvSpPr>
             <a:spLocks noGrp="1"/>
           </p:cNvSpPr>
@@ -2726,7 +2406,7 @@
     </p:spTree>
     <p:extLst>
       <p:ext uri="{BB962C8B-B14F-4D97-AF65-F5344CB8AC3E}">
-        <p14:creationId xmlns:p14="http://schemas.microsoft.com/office/powerpoint/2010/main" val="3292751472"/>
+        <p14:creationId xmlns:p14="http://schemas.microsoft.com/office/powerpoint/2010/main" val="4207366513"/>
       </p:ext>
     </p:extLst>
   </p:cSld>
@@ -2760,13 +2440,7 @@
       </p:grpSpPr>
       <p:sp>
         <p:nvSpPr>
-          <p:cNvPr id="2" name="Title Placeholder 1">
-            <a:extLst>
-              <a:ext uri="{FF2B5EF4-FFF2-40B4-BE49-F238E27FC236}">
-                <a16:creationId xmlns:a16="http://schemas.microsoft.com/office/drawing/2014/main" id="{305E2C87-10FE-0886-AED1-E85728EDBAB8}"/>
-              </a:ext>
-            </a:extLst>
-          </p:cNvPr>
+          <p:cNvPr id="2" name="Title Placeholder 1"/>
           <p:cNvSpPr>
             <a:spLocks noGrp="1"/>
           </p:cNvSpPr>
@@ -2776,8 +2450,8 @@
         </p:nvSpPr>
         <p:spPr>
           <a:xfrm>
-            <a:off x="838200" y="365125"/>
-            <a:ext cx="10515600" cy="1325563"/>
+            <a:off x="471488" y="365127"/>
+            <a:ext cx="5915025" cy="1325563"/>
           </a:xfrm>
           <a:prstGeom prst="rect">
             <a:avLst/>
@@ -2793,18 +2467,13 @@
               <a:rPr lang="en-US"/>
               <a:t>Click to edit Master title style</a:t>
             </a:r>
-          </a:p>
-        </p:txBody>
-      </p:sp>
-      <p:sp>
-        <p:nvSpPr>
-          <p:cNvPr id="3" name="Text Placeholder 2">
-            <a:extLst>
-              <a:ext uri="{FF2B5EF4-FFF2-40B4-BE49-F238E27FC236}">
-                <a16:creationId xmlns:a16="http://schemas.microsoft.com/office/drawing/2014/main" id="{53C5DF42-9BEF-A8F4-12F0-4093D9E2188D}"/>
-              </a:ext>
-            </a:extLst>
-          </p:cNvPr>
+            <a:endParaRPr lang="en-US" dirty="0"/>
+          </a:p>
+        </p:txBody>
+      </p:sp>
+      <p:sp>
+        <p:nvSpPr>
+          <p:cNvPr id="3" name="Text Placeholder 2"/>
           <p:cNvSpPr>
             <a:spLocks noGrp="1"/>
           </p:cNvSpPr>
@@ -2814,8 +2483,8 @@
         </p:nvSpPr>
         <p:spPr>
           <a:xfrm>
-            <a:off x="838200" y="1825625"/>
-            <a:ext cx="10515600" cy="4351338"/>
+            <a:off x="471488" y="1825625"/>
+            <a:ext cx="5915025" cy="4351338"/>
           </a:xfrm>
           <a:prstGeom prst="rect">
             <a:avLst/>
@@ -2860,18 +2529,13 @@
               <a:rPr lang="en-US"/>
               <a:t>Fifth level</a:t>
             </a:r>
-          </a:p>
-        </p:txBody>
-      </p:sp>
-      <p:sp>
-        <p:nvSpPr>
-          <p:cNvPr id="4" name="Date Placeholder 3">
-            <a:extLst>
-              <a:ext uri="{FF2B5EF4-FFF2-40B4-BE49-F238E27FC236}">
-                <a16:creationId xmlns:a16="http://schemas.microsoft.com/office/drawing/2014/main" id="{35A4E744-C06D-96CA-DB2D-518D359D1E87}"/>
-              </a:ext>
-            </a:extLst>
-          </p:cNvPr>
+            <a:endParaRPr lang="en-US" dirty="0"/>
+          </a:p>
+        </p:txBody>
+      </p:sp>
+      <p:sp>
+        <p:nvSpPr>
+          <p:cNvPr id="4" name="Date Placeholder 3"/>
           <p:cNvSpPr>
             <a:spLocks noGrp="1"/>
           </p:cNvSpPr>
@@ -2881,8 +2545,8 @@
         </p:nvSpPr>
         <p:spPr>
           <a:xfrm>
-            <a:off x="838200" y="6356350"/>
-            <a:ext cx="2743200" cy="365125"/>
+            <a:off x="471488" y="6356352"/>
+            <a:ext cx="1543050" cy="365125"/>
           </a:xfrm>
           <a:prstGeom prst="rect">
             <a:avLst/>
@@ -2892,7 +2556,7 @@
           <a:bodyPr vert="horz" lIns="91440" tIns="45720" rIns="91440" bIns="45720" rtlCol="0" anchor="ctr"/>
           <a:lstStyle>
             <a:lvl1pPr algn="l">
-              <a:defRPr sz="1200">
+              <a:defRPr sz="900">
                 <a:solidFill>
                   <a:schemeClr val="tx1">
                     <a:tint val="82000"/>
@@ -2904,7 +2568,7 @@
           <a:p>
             <a:fld id="{D5673968-EB4A-4ACE-9624-571A35D0F85A}" type="datetimeFigureOut">
               <a:rPr lang="en-US" smtClean="0"/>
-              <a:t>5/9/2026</a:t>
+              <a:t>5/18/2026</a:t>
             </a:fld>
             <a:endParaRPr lang="en-US"/>
           </a:p>
@@ -2912,13 +2576,7 @@
       </p:sp>
       <p:sp>
         <p:nvSpPr>
-          <p:cNvPr id="5" name="Footer Placeholder 4">
-            <a:extLst>
-              <a:ext uri="{FF2B5EF4-FFF2-40B4-BE49-F238E27FC236}">
-                <a16:creationId xmlns:a16="http://schemas.microsoft.com/office/drawing/2014/main" id="{83C6E2BF-3386-2A29-ECA5-A572FFE688F8}"/>
-              </a:ext>
-            </a:extLst>
-          </p:cNvPr>
+          <p:cNvPr id="5" name="Footer Placeholder 4"/>
           <p:cNvSpPr>
             <a:spLocks noGrp="1"/>
           </p:cNvSpPr>
@@ -2928,8 +2586,8 @@
         </p:nvSpPr>
         <p:spPr>
           <a:xfrm>
-            <a:off x="4038600" y="6356350"/>
-            <a:ext cx="4114800" cy="365125"/>
+            <a:off x="2271713" y="6356352"/>
+            <a:ext cx="2314575" cy="365125"/>
           </a:xfrm>
           <a:prstGeom prst="rect">
             <a:avLst/>
@@ -2939,7 +2597,7 @@
           <a:bodyPr vert="horz" lIns="91440" tIns="45720" rIns="91440" bIns="45720" rtlCol="0" anchor="ctr"/>
           <a:lstStyle>
             <a:lvl1pPr algn="ctr">
-              <a:defRPr sz="1200">
+              <a:defRPr sz="900">
                 <a:solidFill>
                   <a:schemeClr val="tx1">
                     <a:tint val="82000"/>
@@ -2955,13 +2613,7 @@
       </p:sp>
       <p:sp>
         <p:nvSpPr>
-          <p:cNvPr id="6" name="Slide Number Placeholder 5">
-            <a:extLst>
-              <a:ext uri="{FF2B5EF4-FFF2-40B4-BE49-F238E27FC236}">
-                <a16:creationId xmlns:a16="http://schemas.microsoft.com/office/drawing/2014/main" id="{3B9861E2-5729-92BB-4BE9-F3C41D08C4A9}"/>
-              </a:ext>
-            </a:extLst>
-          </p:cNvPr>
+          <p:cNvPr id="6" name="Slide Number Placeholder 5"/>
           <p:cNvSpPr>
             <a:spLocks noGrp="1"/>
           </p:cNvSpPr>
@@ -2971,8 +2623,8 @@
         </p:nvSpPr>
         <p:spPr>
           <a:xfrm>
-            <a:off x="8610600" y="6356350"/>
-            <a:ext cx="2743200" cy="365125"/>
+            <a:off x="4843463" y="6356352"/>
+            <a:ext cx="1543050" cy="365125"/>
           </a:xfrm>
           <a:prstGeom prst="rect">
             <a:avLst/>
@@ -2982,7 +2634,7 @@
           <a:bodyPr vert="horz" lIns="91440" tIns="45720" rIns="91440" bIns="45720" rtlCol="0" anchor="ctr"/>
           <a:lstStyle>
             <a:lvl1pPr algn="r">
-              <a:defRPr sz="1200">
+              <a:defRPr sz="900">
                 <a:solidFill>
                   <a:schemeClr val="tx1">
                     <a:tint val="82000"/>
@@ -3003,27 +2655,27 @@
     </p:spTree>
     <p:extLst>
       <p:ext uri="{BB962C8B-B14F-4D97-AF65-F5344CB8AC3E}">
-        <p14:creationId xmlns:p14="http://schemas.microsoft.com/office/powerpoint/2010/main" val="3631371729"/>
+        <p14:creationId xmlns:p14="http://schemas.microsoft.com/office/powerpoint/2010/main" val="835766150"/>
       </p:ext>
     </p:extLst>
   </p:cSld>
   <p:clrMap bg1="lt1" tx1="dk1" bg2="lt2" tx2="dk2" accent1="accent1" accent2="accent2" accent3="accent3" accent4="accent4" accent5="accent5" accent6="accent6" hlink="hlink" folHlink="folHlink"/>
   <p:sldLayoutIdLst>
-    <p:sldLayoutId id="2147483649" r:id="rId1"/>
-    <p:sldLayoutId id="2147483650" r:id="rId2"/>
-    <p:sldLayoutId id="2147483651" r:id="rId3"/>
-    <p:sldLayoutId id="2147483652" r:id="rId4"/>
-    <p:sldLayoutId id="2147483653" r:id="rId5"/>
-    <p:sldLayoutId id="2147483654" r:id="rId6"/>
-    <p:sldLayoutId id="2147483655" r:id="rId7"/>
-    <p:sldLayoutId id="2147483656" r:id="rId8"/>
-    <p:sldLayoutId id="2147483657" r:id="rId9"/>
-    <p:sldLayoutId id="2147483658" r:id="rId10"/>
-    <p:sldLayoutId id="2147483659" r:id="rId11"/>
+    <p:sldLayoutId id="2147483661" r:id="rId1"/>
+    <p:sldLayoutId id="2147483662" r:id="rId2"/>
+    <p:sldLayoutId id="2147483663" r:id="rId3"/>
+    <p:sldLayoutId id="2147483664" r:id="rId4"/>
+    <p:sldLayoutId id="2147483665" r:id="rId5"/>
+    <p:sldLayoutId id="2147483666" r:id="rId6"/>
+    <p:sldLayoutId id="2147483667" r:id="rId7"/>
+    <p:sldLayoutId id="2147483668" r:id="rId8"/>
+    <p:sldLayoutId id="2147483669" r:id="rId9"/>
+    <p:sldLayoutId id="2147483670" r:id="rId10"/>
+    <p:sldLayoutId id="2147483671" r:id="rId11"/>
   </p:sldLayoutIdLst>
   <p:txStyles>
     <p:titleStyle>
-      <a:lvl1pPr algn="l" defTabSz="914400" rtl="0" eaLnBrk="1" latinLnBrk="0" hangingPunct="1">
+      <a:lvl1pPr algn="l" defTabSz="685800" rtl="0" eaLnBrk="1" latinLnBrk="0" hangingPunct="1">
         <a:lnSpc>
           <a:spcPct val="90000"/>
         </a:lnSpc>
@@ -3031,7 +2683,7 @@
           <a:spcPct val="0"/>
         </a:spcBef>
         <a:buNone/>
-        <a:defRPr sz="4400" kern="1200">
+        <a:defRPr sz="3300" kern="1200">
           <a:solidFill>
             <a:schemeClr val="tx1"/>
           </a:solidFill>
@@ -3042,16 +2694,16 @@
       </a:lvl1pPr>
     </p:titleStyle>
     <p:bodyStyle>
-      <a:lvl1pPr marL="228600" indent="-228600" algn="l" defTabSz="914400" rtl="0" eaLnBrk="1" latinLnBrk="0" hangingPunct="1">
+      <a:lvl1pPr marL="171450" indent="-171450" algn="l" defTabSz="685800" rtl="0" eaLnBrk="1" latinLnBrk="0" hangingPunct="1">
         <a:lnSpc>
           <a:spcPct val="90000"/>
         </a:lnSpc>
         <a:spcBef>
-          <a:spcPts val="1000"/>
+          <a:spcPts val="750"/>
         </a:spcBef>
         <a:buFont typeface="Arial" panose="020B0604020202020204" pitchFamily="34" charset="0"/>
         <a:buChar char="•"/>
-        <a:defRPr sz="2800" kern="1200">
+        <a:defRPr sz="2100" kern="1200">
           <a:solidFill>
             <a:schemeClr val="tx1"/>
           </a:solidFill>
@@ -3060,48 +2712,12 @@
           <a:cs typeface="+mn-cs"/>
         </a:defRPr>
       </a:lvl1pPr>
-      <a:lvl2pPr marL="685800" indent="-228600" algn="l" defTabSz="914400" rtl="0" eaLnBrk="1" latinLnBrk="0" hangingPunct="1">
+      <a:lvl2pPr marL="514350" indent="-171450" algn="l" defTabSz="685800" rtl="0" eaLnBrk="1" latinLnBrk="0" hangingPunct="1">
         <a:lnSpc>
           <a:spcPct val="90000"/>
         </a:lnSpc>
         <a:spcBef>
-          <a:spcPts val="500"/>
-        </a:spcBef>
-        <a:buFont typeface="Arial" panose="020B0604020202020204" pitchFamily="34" charset="0"/>
-        <a:buChar char="•"/>
-        <a:defRPr sz="2400" kern="1200">
-          <a:solidFill>
-            <a:schemeClr val="tx1"/>
-          </a:solidFill>
-          <a:latin typeface="+mn-lt"/>
-          <a:ea typeface="+mn-ea"/>
-          <a:cs typeface="+mn-cs"/>
-        </a:defRPr>
-      </a:lvl2pPr>
-      <a:lvl3pPr marL="1143000" indent="-228600" algn="l" defTabSz="914400" rtl="0" eaLnBrk="1" latinLnBrk="0" hangingPunct="1">
-        <a:lnSpc>
-          <a:spcPct val="90000"/>
-        </a:lnSpc>
-        <a:spcBef>
-          <a:spcPts val="500"/>
-        </a:spcBef>
-        <a:buFont typeface="Arial" panose="020B0604020202020204" pitchFamily="34" charset="0"/>
-        <a:buChar char="•"/>
-        <a:defRPr sz="2000" kern="1200">
-          <a:solidFill>
-            <a:schemeClr val="tx1"/>
-          </a:solidFill>
-          <a:latin typeface="+mn-lt"/>
-          <a:ea typeface="+mn-ea"/>
-          <a:cs typeface="+mn-cs"/>
-        </a:defRPr>
-      </a:lvl3pPr>
-      <a:lvl4pPr marL="1600200" indent="-228600" algn="l" defTabSz="914400" rtl="0" eaLnBrk="1" latinLnBrk="0" hangingPunct="1">
-        <a:lnSpc>
-          <a:spcPct val="90000"/>
-        </a:lnSpc>
-        <a:spcBef>
-          <a:spcPts val="500"/>
+          <a:spcPts val="375"/>
         </a:spcBef>
         <a:buFont typeface="Arial" panose="020B0604020202020204" pitchFamily="34" charset="0"/>
         <a:buChar char="•"/>
@@ -3113,17 +2729,53 @@
           <a:ea typeface="+mn-ea"/>
           <a:cs typeface="+mn-cs"/>
         </a:defRPr>
-      </a:lvl4pPr>
-      <a:lvl5pPr marL="2057400" indent="-228600" algn="l" defTabSz="914400" rtl="0" eaLnBrk="1" latinLnBrk="0" hangingPunct="1">
+      </a:lvl2pPr>
+      <a:lvl3pPr marL="857250" indent="-171450" algn="l" defTabSz="685800" rtl="0" eaLnBrk="1" latinLnBrk="0" hangingPunct="1">
         <a:lnSpc>
           <a:spcPct val="90000"/>
         </a:lnSpc>
         <a:spcBef>
-          <a:spcPts val="500"/>
+          <a:spcPts val="375"/>
         </a:spcBef>
         <a:buFont typeface="Arial" panose="020B0604020202020204" pitchFamily="34" charset="0"/>
         <a:buChar char="•"/>
-        <a:defRPr sz="1800" kern="1200">
+        <a:defRPr sz="1500" kern="1200">
+          <a:solidFill>
+            <a:schemeClr val="tx1"/>
+          </a:solidFill>
+          <a:latin typeface="+mn-lt"/>
+          <a:ea typeface="+mn-ea"/>
+          <a:cs typeface="+mn-cs"/>
+        </a:defRPr>
+      </a:lvl3pPr>
+      <a:lvl4pPr marL="1200150" indent="-171450" algn="l" defTabSz="685800" rtl="0" eaLnBrk="1" latinLnBrk="0" hangingPunct="1">
+        <a:lnSpc>
+          <a:spcPct val="90000"/>
+        </a:lnSpc>
+        <a:spcBef>
+          <a:spcPts val="375"/>
+        </a:spcBef>
+        <a:buFont typeface="Arial" panose="020B0604020202020204" pitchFamily="34" charset="0"/>
+        <a:buChar char="•"/>
+        <a:defRPr sz="1350" kern="1200">
+          <a:solidFill>
+            <a:schemeClr val="tx1"/>
+          </a:solidFill>
+          <a:latin typeface="+mn-lt"/>
+          <a:ea typeface="+mn-ea"/>
+          <a:cs typeface="+mn-cs"/>
+        </a:defRPr>
+      </a:lvl4pPr>
+      <a:lvl5pPr marL="1543050" indent="-171450" algn="l" defTabSz="685800" rtl="0" eaLnBrk="1" latinLnBrk="0" hangingPunct="1">
+        <a:lnSpc>
+          <a:spcPct val="90000"/>
+        </a:lnSpc>
+        <a:spcBef>
+          <a:spcPts val="375"/>
+        </a:spcBef>
+        <a:buFont typeface="Arial" panose="020B0604020202020204" pitchFamily="34" charset="0"/>
+        <a:buChar char="•"/>
+        <a:defRPr sz="1350" kern="1200">
           <a:solidFill>
             <a:schemeClr val="tx1"/>
           </a:solidFill>
@@ -3132,16 +2784,16 @@
           <a:cs typeface="+mn-cs"/>
         </a:defRPr>
       </a:lvl5pPr>
-      <a:lvl6pPr marL="2514600" indent="-228600" algn="l" defTabSz="914400" rtl="0" eaLnBrk="1" latinLnBrk="0" hangingPunct="1">
+      <a:lvl6pPr marL="1885950" indent="-171450" algn="l" defTabSz="685800" rtl="0" eaLnBrk="1" latinLnBrk="0" hangingPunct="1">
         <a:lnSpc>
           <a:spcPct val="90000"/>
         </a:lnSpc>
         <a:spcBef>
-          <a:spcPts val="500"/>
+          <a:spcPts val="375"/>
         </a:spcBef>
         <a:buFont typeface="Arial" panose="020B0604020202020204" pitchFamily="34" charset="0"/>
         <a:buChar char="•"/>
-        <a:defRPr sz="1800" kern="1200">
+        <a:defRPr sz="1350" kern="1200">
           <a:solidFill>
             <a:schemeClr val="tx1"/>
           </a:solidFill>
@@ -3150,16 +2802,16 @@
           <a:cs typeface="+mn-cs"/>
         </a:defRPr>
       </a:lvl6pPr>
-      <a:lvl7pPr marL="2971800" indent="-228600" algn="l" defTabSz="914400" rtl="0" eaLnBrk="1" latinLnBrk="0" hangingPunct="1">
+      <a:lvl7pPr marL="2228850" indent="-171450" algn="l" defTabSz="685800" rtl="0" eaLnBrk="1" latinLnBrk="0" hangingPunct="1">
         <a:lnSpc>
           <a:spcPct val="90000"/>
         </a:lnSpc>
         <a:spcBef>
-          <a:spcPts val="500"/>
+          <a:spcPts val="375"/>
         </a:spcBef>
         <a:buFont typeface="Arial" panose="020B0604020202020204" pitchFamily="34" charset="0"/>
         <a:buChar char="•"/>
-        <a:defRPr sz="1800" kern="1200">
+        <a:defRPr sz="1350" kern="1200">
           <a:solidFill>
             <a:schemeClr val="tx1"/>
           </a:solidFill>
@@ -3168,16 +2820,16 @@
           <a:cs typeface="+mn-cs"/>
         </a:defRPr>
       </a:lvl7pPr>
-      <a:lvl8pPr marL="3429000" indent="-228600" algn="l" defTabSz="914400" rtl="0" eaLnBrk="1" latinLnBrk="0" hangingPunct="1">
+      <a:lvl8pPr marL="2571750" indent="-171450" algn="l" defTabSz="685800" rtl="0" eaLnBrk="1" latinLnBrk="0" hangingPunct="1">
         <a:lnSpc>
           <a:spcPct val="90000"/>
         </a:lnSpc>
         <a:spcBef>
-          <a:spcPts val="500"/>
+          <a:spcPts val="375"/>
         </a:spcBef>
         <a:buFont typeface="Arial" panose="020B0604020202020204" pitchFamily="34" charset="0"/>
         <a:buChar char="•"/>
-        <a:defRPr sz="1800" kern="1200">
+        <a:defRPr sz="1350" kern="1200">
           <a:solidFill>
             <a:schemeClr val="tx1"/>
           </a:solidFill>
@@ -3186,16 +2838,16 @@
           <a:cs typeface="+mn-cs"/>
         </a:defRPr>
       </a:lvl8pPr>
-      <a:lvl9pPr marL="3886200" indent="-228600" algn="l" defTabSz="914400" rtl="0" eaLnBrk="1" latinLnBrk="0" hangingPunct="1">
+      <a:lvl9pPr marL="2914650" indent="-171450" algn="l" defTabSz="685800" rtl="0" eaLnBrk="1" latinLnBrk="0" hangingPunct="1">
         <a:lnSpc>
           <a:spcPct val="90000"/>
         </a:lnSpc>
         <a:spcBef>
-          <a:spcPts val="500"/>
+          <a:spcPts val="375"/>
         </a:spcBef>
         <a:buFont typeface="Arial" panose="020B0604020202020204" pitchFamily="34" charset="0"/>
         <a:buChar char="•"/>
-        <a:defRPr sz="1800" kern="1200">
+        <a:defRPr sz="1350" kern="1200">
           <a:solidFill>
             <a:schemeClr val="tx1"/>
           </a:solidFill>
@@ -3209,8 +2861,8 @@
       <a:defPPr>
         <a:defRPr lang="en-US"/>
       </a:defPPr>
-      <a:lvl1pPr marL="0" algn="l" defTabSz="914400" rtl="0" eaLnBrk="1" latinLnBrk="0" hangingPunct="1">
-        <a:defRPr sz="1800" kern="1200">
+      <a:lvl1pPr marL="0" algn="l" defTabSz="685800" rtl="0" eaLnBrk="1" latinLnBrk="0" hangingPunct="1">
+        <a:defRPr sz="1350" kern="1200">
           <a:solidFill>
             <a:schemeClr val="tx1"/>
           </a:solidFill>
@@ -3219,8 +2871,8 @@
           <a:cs typeface="+mn-cs"/>
         </a:defRPr>
       </a:lvl1pPr>
-      <a:lvl2pPr marL="457200" algn="l" defTabSz="914400" rtl="0" eaLnBrk="1" latinLnBrk="0" hangingPunct="1">
-        <a:defRPr sz="1800" kern="1200">
+      <a:lvl2pPr marL="342900" algn="l" defTabSz="685800" rtl="0" eaLnBrk="1" latinLnBrk="0" hangingPunct="1">
+        <a:defRPr sz="1350" kern="1200">
           <a:solidFill>
             <a:schemeClr val="tx1"/>
           </a:solidFill>
@@ -3229,8 +2881,8 @@
           <a:cs typeface="+mn-cs"/>
         </a:defRPr>
       </a:lvl2pPr>
-      <a:lvl3pPr marL="914400" algn="l" defTabSz="914400" rtl="0" eaLnBrk="1" latinLnBrk="0" hangingPunct="1">
-        <a:defRPr sz="1800" kern="1200">
+      <a:lvl3pPr marL="685800" algn="l" defTabSz="685800" rtl="0" eaLnBrk="1" latinLnBrk="0" hangingPunct="1">
+        <a:defRPr sz="1350" kern="1200">
           <a:solidFill>
             <a:schemeClr val="tx1"/>
           </a:solidFill>
@@ -3239,8 +2891,8 @@
           <a:cs typeface="+mn-cs"/>
         </a:defRPr>
       </a:lvl3pPr>
-      <a:lvl4pPr marL="1371600" algn="l" defTabSz="914400" rtl="0" eaLnBrk="1" latinLnBrk="0" hangingPunct="1">
-        <a:defRPr sz="1800" kern="1200">
+      <a:lvl4pPr marL="1028700" algn="l" defTabSz="685800" rtl="0" eaLnBrk="1" latinLnBrk="0" hangingPunct="1">
+        <a:defRPr sz="1350" kern="1200">
           <a:solidFill>
             <a:schemeClr val="tx1"/>
           </a:solidFill>
@@ -3249,8 +2901,8 @@
           <a:cs typeface="+mn-cs"/>
         </a:defRPr>
       </a:lvl4pPr>
-      <a:lvl5pPr marL="1828800" algn="l" defTabSz="914400" rtl="0" eaLnBrk="1" latinLnBrk="0" hangingPunct="1">
-        <a:defRPr sz="1800" kern="1200">
+      <a:lvl5pPr marL="1371600" algn="l" defTabSz="685800" rtl="0" eaLnBrk="1" latinLnBrk="0" hangingPunct="1">
+        <a:defRPr sz="1350" kern="1200">
           <a:solidFill>
             <a:schemeClr val="tx1"/>
           </a:solidFill>
@@ -3259,8 +2911,8 @@
           <a:cs typeface="+mn-cs"/>
         </a:defRPr>
       </a:lvl5pPr>
-      <a:lvl6pPr marL="2286000" algn="l" defTabSz="914400" rtl="0" eaLnBrk="1" latinLnBrk="0" hangingPunct="1">
-        <a:defRPr sz="1800" kern="1200">
+      <a:lvl6pPr marL="1714500" algn="l" defTabSz="685800" rtl="0" eaLnBrk="1" latinLnBrk="0" hangingPunct="1">
+        <a:defRPr sz="1350" kern="1200">
           <a:solidFill>
             <a:schemeClr val="tx1"/>
           </a:solidFill>
@@ -3269,8 +2921,8 @@
           <a:cs typeface="+mn-cs"/>
         </a:defRPr>
       </a:lvl6pPr>
-      <a:lvl7pPr marL="2743200" algn="l" defTabSz="914400" rtl="0" eaLnBrk="1" latinLnBrk="0" hangingPunct="1">
-        <a:defRPr sz="1800" kern="1200">
+      <a:lvl7pPr marL="2057400" algn="l" defTabSz="685800" rtl="0" eaLnBrk="1" latinLnBrk="0" hangingPunct="1">
+        <a:defRPr sz="1350" kern="1200">
           <a:solidFill>
             <a:schemeClr val="tx1"/>
           </a:solidFill>
@@ -3279,8 +2931,8 @@
           <a:cs typeface="+mn-cs"/>
         </a:defRPr>
       </a:lvl7pPr>
-      <a:lvl8pPr marL="3200400" algn="l" defTabSz="914400" rtl="0" eaLnBrk="1" latinLnBrk="0" hangingPunct="1">
-        <a:defRPr sz="1800" kern="1200">
+      <a:lvl8pPr marL="2400300" algn="l" defTabSz="685800" rtl="0" eaLnBrk="1" latinLnBrk="0" hangingPunct="1">
+        <a:defRPr sz="1350" kern="1200">
           <a:solidFill>
             <a:schemeClr val="tx1"/>
           </a:solidFill>
@@ -3289,8 +2941,8 @@
           <a:cs typeface="+mn-cs"/>
         </a:defRPr>
       </a:lvl8pPr>
-      <a:lvl9pPr marL="3657600" algn="l" defTabSz="914400" rtl="0" eaLnBrk="1" latinLnBrk="0" hangingPunct="1">
-        <a:defRPr sz="1800" kern="1200">
+      <a:lvl9pPr marL="2743200" algn="l" defTabSz="685800" rtl="0" eaLnBrk="1" latinLnBrk="0" hangingPunct="1">
+        <a:defRPr sz="1350" kern="1200">
           <a:solidFill>
             <a:schemeClr val="tx1"/>
           </a:solidFill>
@@ -3343,8 +2995,8 @@
         </p:nvSpPr>
         <p:spPr>
           <a:xfrm>
-            <a:off x="2260600" y="50800"/>
-            <a:ext cx="7670800" cy="6756400"/>
+            <a:off x="1" y="408756"/>
+            <a:ext cx="6858000" cy="6040490"/>
           </a:xfrm>
           <a:prstGeom prst="ellipse">
             <a:avLst/>
@@ -3377,7 +3029,7 @@
           <a:lstStyle/>
           <a:p>
             <a:pPr algn="ctr"/>
-            <a:endParaRPr lang="en-US"/>
+            <a:endParaRPr lang="en-US" sz="1013"/>
           </a:p>
         </p:txBody>
       </p:sp>
@@ -3409,8 +3061,8 @@
         </p:blipFill>
         <p:spPr>
           <a:xfrm>
-            <a:off x="3011551" y="1108174"/>
-            <a:ext cx="6168898" cy="4819451"/>
+            <a:off x="671381" y="1324618"/>
+            <a:ext cx="5515240" cy="4308780"/>
           </a:xfrm>
           <a:prstGeom prst="rect">
             <a:avLst/>
@@ -3433,7 +3085,7 @@
 <file path=ppt/theme/theme1.xml><?xml version="1.0" encoding="utf-8"?>
 <a:theme xmlns:a="http://schemas.openxmlformats.org/drawingml/2006/main" name="Office Theme">
   <a:themeElements>
-    <a:clrScheme name="Office">
+    <a:clrScheme name="Office Theme">
       <a:dk1>
         <a:sysClr val="windowText" lastClr="000000"/>
       </a:dk1>
@@ -3471,7 +3123,7 @@
         <a:srgbClr val="96607D"/>
       </a:folHlink>
     </a:clrScheme>
-    <a:fontScheme name="Office">
+    <a:fontScheme name="Office Theme">
       <a:majorFont>
         <a:latin typeface="Aptos Display" panose="02110004020202020204"/>
         <a:ea typeface=""/>
@@ -3577,7 +3229,7 @@
         <a:font script="Tfng" typeface="Ebrima"/>
       </a:minorFont>
     </a:fontScheme>
-    <a:fmtScheme name="Office">
+    <a:fmtScheme name="Office Theme">
       <a:fillStyleLst>
         <a:solidFill>
           <a:schemeClr val="phClr"/>
